--- a/exports/pptx/lessons/middle-module-01-what-is-iks/day-07-astronomy.pptx
+++ b/exports/pptx/lessons/middle-module-01-what-is-iks/day-07-astronomy.pptx
@@ -18,9 +18,16 @@
     <p:sldId id="266" r:id="rId12"/>
     <p:sldId id="267" r:id="rId13"/>
     <p:sldId id="268" r:id="rId14"/>
+    <p:sldId id="269" r:id="rId15"/>
+    <p:sldId id="270" r:id="rId16"/>
+    <p:sldId id="271" r:id="rId17"/>
+    <p:sldId id="272" r:id="rId18"/>
+    <p:sldId id="273" r:id="rId19"/>
+    <p:sldId id="274" r:id="rId20"/>
+    <p:sldId id="275" r:id="rId21"/>
   </p:sldIdLst>
   <p:notesMasterIdLst>
-    <p:notesMasterId r:id="rId15"/>
+    <p:notesMasterId r:id="rId22"/>
   </p:notesMasterIdLst>
   <p:sldSz cx="9144000" cy="5143500"/>
   <p:notesSz cx="5143500" cy="9144000"/>
@@ -908,6 +915,534 @@
 </p:notes>
 </file>
 
+<file path=ppt/notesSlides/notesSlide14.xml><?xml version="1.0" encoding="utf-8"?>
+<p:notes xmlns:a="http://schemas.openxmlformats.org/drawingml/2006/main" xmlns:r="http://schemas.openxmlformats.org/officeDocument/2006/relationships" xmlns:p="http://schemas.openxmlformats.org/presentationml/2006/main">
+  <p:cSld>
+    <p:spTree>
+      <p:nvGrpSpPr>
+        <p:cNvPr id="1" name=""/>
+        <p:cNvGrpSpPr/>
+        <p:nvPr/>
+      </p:nvGrpSpPr>
+      <p:grpSpPr>
+        <a:xfrm>
+          <a:off x="0" y="0"/>
+          <a:ext cx="0" cy="0"/>
+          <a:chOff x="0" y="0"/>
+          <a:chExt cx="0" cy="0"/>
+        </a:xfrm>
+      </p:grpSpPr>
+      <p:sp>
+        <p:nvSpPr>
+          <p:cNvPr id="2" name="Slide Image Placeholder 1"/>
+          <p:cNvSpPr>
+            <a:spLocks noGrp="1" noRot="1" noChangeAspect="1"/>
+          </p:cNvSpPr>
+          <p:nvPr>
+            <p:ph type="sldImg"/>
+          </p:nvPr>
+        </p:nvSpPr>
+        <p:spPr/>
+      </p:sp>
+      <p:sp>
+        <p:nvSpPr>
+          <p:cNvPr id="3" name="Notes Placeholder 2"/>
+          <p:cNvSpPr>
+            <a:spLocks noGrp="1"/>
+          </p:cNvSpPr>
+          <p:nvPr>
+            <p:ph type="body" idx="1"/>
+          </p:nvPr>
+        </p:nvSpPr>
+        <p:spPr/>
+        <p:txBody>
+          <a:bodyPr/>
+          <a:lstStyle/>
+          <a:p>
+            <a:r>
+              <a:rPr lang="en-US" dirty="0"/>
+              <a:t/>
+            </a:r>
+            <a:endParaRPr lang="en-US" dirty="0"/>
+          </a:p>
+        </p:txBody>
+      </p:sp>
+      <p:sp>
+        <p:nvSpPr>
+          <p:cNvPr id="4" name="Slide Number Placeholder 3"/>
+          <p:cNvSpPr>
+            <a:spLocks noGrp="1"/>
+          </p:cNvSpPr>
+          <p:nvPr>
+            <p:ph type="sldNum" sz="quarter" idx="10"/>
+          </p:nvPr>
+        </p:nvSpPr>
+        <p:spPr/>
+        <p:txBody>
+          <a:bodyPr/>
+          <a:lstStyle/>
+          <a:p>
+            <a:fld id="{F7021451-1387-4CA6-816F-3879F97B5CBC}" type="slidenum">
+              <a:rPr lang="en-US"/>
+              <a:t>14</a:t>
+            </a:fld>
+            <a:endParaRPr lang="en-US"/>
+          </a:p>
+        </p:txBody>
+      </p:sp>
+    </p:spTree>
+    <p:extLst>
+      <p:ext uri="{BB962C8B-B14F-4D97-AF65-F5344CB8AC3E}">
+        <p14:creationId xmlns:p14="http://schemas.microsoft.com/office/powerpoint/2010/main" val="1024086991"/>
+      </p:ext>
+    </p:extLst>
+  </p:cSld>
+  <p:clrMapOvr>
+    <a:masterClrMapping/>
+  </p:clrMapOvr>
+</p:notes>
+</file>
+
+<file path=ppt/notesSlides/notesSlide15.xml><?xml version="1.0" encoding="utf-8"?>
+<p:notes xmlns:a="http://schemas.openxmlformats.org/drawingml/2006/main" xmlns:r="http://schemas.openxmlformats.org/officeDocument/2006/relationships" xmlns:p="http://schemas.openxmlformats.org/presentationml/2006/main">
+  <p:cSld>
+    <p:spTree>
+      <p:nvGrpSpPr>
+        <p:cNvPr id="1" name=""/>
+        <p:cNvGrpSpPr/>
+        <p:nvPr/>
+      </p:nvGrpSpPr>
+      <p:grpSpPr>
+        <a:xfrm>
+          <a:off x="0" y="0"/>
+          <a:ext cx="0" cy="0"/>
+          <a:chOff x="0" y="0"/>
+          <a:chExt cx="0" cy="0"/>
+        </a:xfrm>
+      </p:grpSpPr>
+      <p:sp>
+        <p:nvSpPr>
+          <p:cNvPr id="2" name="Slide Image Placeholder 1"/>
+          <p:cNvSpPr>
+            <a:spLocks noGrp="1" noRot="1" noChangeAspect="1"/>
+          </p:cNvSpPr>
+          <p:nvPr>
+            <p:ph type="sldImg"/>
+          </p:nvPr>
+        </p:nvSpPr>
+        <p:spPr/>
+      </p:sp>
+      <p:sp>
+        <p:nvSpPr>
+          <p:cNvPr id="3" name="Notes Placeholder 2"/>
+          <p:cNvSpPr>
+            <a:spLocks noGrp="1"/>
+          </p:cNvSpPr>
+          <p:nvPr>
+            <p:ph type="body" idx="1"/>
+          </p:nvPr>
+        </p:nvSpPr>
+        <p:spPr/>
+        <p:txBody>
+          <a:bodyPr/>
+          <a:lstStyle/>
+          <a:p>
+            <a:r>
+              <a:rPr lang="en-US" dirty="0"/>
+              <a:t/>
+            </a:r>
+            <a:endParaRPr lang="en-US" dirty="0"/>
+          </a:p>
+        </p:txBody>
+      </p:sp>
+      <p:sp>
+        <p:nvSpPr>
+          <p:cNvPr id="4" name="Slide Number Placeholder 3"/>
+          <p:cNvSpPr>
+            <a:spLocks noGrp="1"/>
+          </p:cNvSpPr>
+          <p:nvPr>
+            <p:ph type="sldNum" sz="quarter" idx="10"/>
+          </p:nvPr>
+        </p:nvSpPr>
+        <p:spPr/>
+        <p:txBody>
+          <a:bodyPr/>
+          <a:lstStyle/>
+          <a:p>
+            <a:fld id="{F7021451-1387-4CA6-816F-3879F97B5CBC}" type="slidenum">
+              <a:rPr lang="en-US"/>
+              <a:t>15</a:t>
+            </a:fld>
+            <a:endParaRPr lang="en-US"/>
+          </a:p>
+        </p:txBody>
+      </p:sp>
+    </p:spTree>
+    <p:extLst>
+      <p:ext uri="{BB962C8B-B14F-4D97-AF65-F5344CB8AC3E}">
+        <p14:creationId xmlns:p14="http://schemas.microsoft.com/office/powerpoint/2010/main" val="1024086991"/>
+      </p:ext>
+    </p:extLst>
+  </p:cSld>
+  <p:clrMapOvr>
+    <a:masterClrMapping/>
+  </p:clrMapOvr>
+</p:notes>
+</file>
+
+<file path=ppt/notesSlides/notesSlide16.xml><?xml version="1.0" encoding="utf-8"?>
+<p:notes xmlns:a="http://schemas.openxmlformats.org/drawingml/2006/main" xmlns:r="http://schemas.openxmlformats.org/officeDocument/2006/relationships" xmlns:p="http://schemas.openxmlformats.org/presentationml/2006/main">
+  <p:cSld>
+    <p:spTree>
+      <p:nvGrpSpPr>
+        <p:cNvPr id="1" name=""/>
+        <p:cNvGrpSpPr/>
+        <p:nvPr/>
+      </p:nvGrpSpPr>
+      <p:grpSpPr>
+        <a:xfrm>
+          <a:off x="0" y="0"/>
+          <a:ext cx="0" cy="0"/>
+          <a:chOff x="0" y="0"/>
+          <a:chExt cx="0" cy="0"/>
+        </a:xfrm>
+      </p:grpSpPr>
+      <p:sp>
+        <p:nvSpPr>
+          <p:cNvPr id="2" name="Slide Image Placeholder 1"/>
+          <p:cNvSpPr>
+            <a:spLocks noGrp="1" noRot="1" noChangeAspect="1"/>
+          </p:cNvSpPr>
+          <p:nvPr>
+            <p:ph type="sldImg"/>
+          </p:nvPr>
+        </p:nvSpPr>
+        <p:spPr/>
+      </p:sp>
+      <p:sp>
+        <p:nvSpPr>
+          <p:cNvPr id="3" name="Notes Placeholder 2"/>
+          <p:cNvSpPr>
+            <a:spLocks noGrp="1"/>
+          </p:cNvSpPr>
+          <p:nvPr>
+            <p:ph type="body" idx="1"/>
+          </p:nvPr>
+        </p:nvSpPr>
+        <p:spPr/>
+        <p:txBody>
+          <a:bodyPr/>
+          <a:lstStyle/>
+          <a:p>
+            <a:r>
+              <a:rPr lang="en-US" dirty="0"/>
+              <a:t/>
+            </a:r>
+            <a:endParaRPr lang="en-US" dirty="0"/>
+          </a:p>
+        </p:txBody>
+      </p:sp>
+      <p:sp>
+        <p:nvSpPr>
+          <p:cNvPr id="4" name="Slide Number Placeholder 3"/>
+          <p:cNvSpPr>
+            <a:spLocks noGrp="1"/>
+          </p:cNvSpPr>
+          <p:nvPr>
+            <p:ph type="sldNum" sz="quarter" idx="10"/>
+          </p:nvPr>
+        </p:nvSpPr>
+        <p:spPr/>
+        <p:txBody>
+          <a:bodyPr/>
+          <a:lstStyle/>
+          <a:p>
+            <a:fld id="{F7021451-1387-4CA6-816F-3879F97B5CBC}" type="slidenum">
+              <a:rPr lang="en-US"/>
+              <a:t>16</a:t>
+            </a:fld>
+            <a:endParaRPr lang="en-US"/>
+          </a:p>
+        </p:txBody>
+      </p:sp>
+    </p:spTree>
+    <p:extLst>
+      <p:ext uri="{BB962C8B-B14F-4D97-AF65-F5344CB8AC3E}">
+        <p14:creationId xmlns:p14="http://schemas.microsoft.com/office/powerpoint/2010/main" val="1024086991"/>
+      </p:ext>
+    </p:extLst>
+  </p:cSld>
+  <p:clrMapOvr>
+    <a:masterClrMapping/>
+  </p:clrMapOvr>
+</p:notes>
+</file>
+
+<file path=ppt/notesSlides/notesSlide17.xml><?xml version="1.0" encoding="utf-8"?>
+<p:notes xmlns:a="http://schemas.openxmlformats.org/drawingml/2006/main" xmlns:r="http://schemas.openxmlformats.org/officeDocument/2006/relationships" xmlns:p="http://schemas.openxmlformats.org/presentationml/2006/main">
+  <p:cSld>
+    <p:spTree>
+      <p:nvGrpSpPr>
+        <p:cNvPr id="1" name=""/>
+        <p:cNvGrpSpPr/>
+        <p:nvPr/>
+      </p:nvGrpSpPr>
+      <p:grpSpPr>
+        <a:xfrm>
+          <a:off x="0" y="0"/>
+          <a:ext cx="0" cy="0"/>
+          <a:chOff x="0" y="0"/>
+          <a:chExt cx="0" cy="0"/>
+        </a:xfrm>
+      </p:grpSpPr>
+      <p:sp>
+        <p:nvSpPr>
+          <p:cNvPr id="2" name="Slide Image Placeholder 1"/>
+          <p:cNvSpPr>
+            <a:spLocks noGrp="1" noRot="1" noChangeAspect="1"/>
+          </p:cNvSpPr>
+          <p:nvPr>
+            <p:ph type="sldImg"/>
+          </p:nvPr>
+        </p:nvSpPr>
+        <p:spPr/>
+      </p:sp>
+      <p:sp>
+        <p:nvSpPr>
+          <p:cNvPr id="3" name="Notes Placeholder 2"/>
+          <p:cNvSpPr>
+            <a:spLocks noGrp="1"/>
+          </p:cNvSpPr>
+          <p:nvPr>
+            <p:ph type="body" idx="1"/>
+          </p:nvPr>
+        </p:nvSpPr>
+        <p:spPr/>
+        <p:txBody>
+          <a:bodyPr/>
+          <a:lstStyle/>
+          <a:p>
+            <a:r>
+              <a:rPr lang="en-US" dirty="0"/>
+              <a:t/>
+            </a:r>
+            <a:endParaRPr lang="en-US" dirty="0"/>
+          </a:p>
+        </p:txBody>
+      </p:sp>
+      <p:sp>
+        <p:nvSpPr>
+          <p:cNvPr id="4" name="Slide Number Placeholder 3"/>
+          <p:cNvSpPr>
+            <a:spLocks noGrp="1"/>
+          </p:cNvSpPr>
+          <p:nvPr>
+            <p:ph type="sldNum" sz="quarter" idx="10"/>
+          </p:nvPr>
+        </p:nvSpPr>
+        <p:spPr/>
+        <p:txBody>
+          <a:bodyPr/>
+          <a:lstStyle/>
+          <a:p>
+            <a:fld id="{F7021451-1387-4CA6-816F-3879F97B5CBC}" type="slidenum">
+              <a:rPr lang="en-US"/>
+              <a:t>17</a:t>
+            </a:fld>
+            <a:endParaRPr lang="en-US"/>
+          </a:p>
+        </p:txBody>
+      </p:sp>
+    </p:spTree>
+    <p:extLst>
+      <p:ext uri="{BB962C8B-B14F-4D97-AF65-F5344CB8AC3E}">
+        <p14:creationId xmlns:p14="http://schemas.microsoft.com/office/powerpoint/2010/main" val="1024086991"/>
+      </p:ext>
+    </p:extLst>
+  </p:cSld>
+  <p:clrMapOvr>
+    <a:masterClrMapping/>
+  </p:clrMapOvr>
+</p:notes>
+</file>
+
+<file path=ppt/notesSlides/notesSlide18.xml><?xml version="1.0" encoding="utf-8"?>
+<p:notes xmlns:a="http://schemas.openxmlformats.org/drawingml/2006/main" xmlns:r="http://schemas.openxmlformats.org/officeDocument/2006/relationships" xmlns:p="http://schemas.openxmlformats.org/presentationml/2006/main">
+  <p:cSld>
+    <p:spTree>
+      <p:nvGrpSpPr>
+        <p:cNvPr id="1" name=""/>
+        <p:cNvGrpSpPr/>
+        <p:nvPr/>
+      </p:nvGrpSpPr>
+      <p:grpSpPr>
+        <a:xfrm>
+          <a:off x="0" y="0"/>
+          <a:ext cx="0" cy="0"/>
+          <a:chOff x="0" y="0"/>
+          <a:chExt cx="0" cy="0"/>
+        </a:xfrm>
+      </p:grpSpPr>
+      <p:sp>
+        <p:nvSpPr>
+          <p:cNvPr id="2" name="Slide Image Placeholder 1"/>
+          <p:cNvSpPr>
+            <a:spLocks noGrp="1" noRot="1" noChangeAspect="1"/>
+          </p:cNvSpPr>
+          <p:nvPr>
+            <p:ph type="sldImg"/>
+          </p:nvPr>
+        </p:nvSpPr>
+        <p:spPr/>
+      </p:sp>
+      <p:sp>
+        <p:nvSpPr>
+          <p:cNvPr id="3" name="Notes Placeholder 2"/>
+          <p:cNvSpPr>
+            <a:spLocks noGrp="1"/>
+          </p:cNvSpPr>
+          <p:nvPr>
+            <p:ph type="body" idx="1"/>
+          </p:nvPr>
+        </p:nvSpPr>
+        <p:spPr/>
+        <p:txBody>
+          <a:bodyPr/>
+          <a:lstStyle/>
+          <a:p>
+            <a:r>
+              <a:rPr lang="en-US" dirty="0"/>
+              <a:t/>
+            </a:r>
+            <a:endParaRPr lang="en-US" dirty="0"/>
+          </a:p>
+        </p:txBody>
+      </p:sp>
+      <p:sp>
+        <p:nvSpPr>
+          <p:cNvPr id="4" name="Slide Number Placeholder 3"/>
+          <p:cNvSpPr>
+            <a:spLocks noGrp="1"/>
+          </p:cNvSpPr>
+          <p:nvPr>
+            <p:ph type="sldNum" sz="quarter" idx="10"/>
+          </p:nvPr>
+        </p:nvSpPr>
+        <p:spPr/>
+        <p:txBody>
+          <a:bodyPr/>
+          <a:lstStyle/>
+          <a:p>
+            <a:fld id="{F7021451-1387-4CA6-816F-3879F97B5CBC}" type="slidenum">
+              <a:rPr lang="en-US"/>
+              <a:t>18</a:t>
+            </a:fld>
+            <a:endParaRPr lang="en-US"/>
+          </a:p>
+        </p:txBody>
+      </p:sp>
+    </p:spTree>
+    <p:extLst>
+      <p:ext uri="{BB962C8B-B14F-4D97-AF65-F5344CB8AC3E}">
+        <p14:creationId xmlns:p14="http://schemas.microsoft.com/office/powerpoint/2010/main" val="1024086991"/>
+      </p:ext>
+    </p:extLst>
+  </p:cSld>
+  <p:clrMapOvr>
+    <a:masterClrMapping/>
+  </p:clrMapOvr>
+</p:notes>
+</file>
+
+<file path=ppt/notesSlides/notesSlide19.xml><?xml version="1.0" encoding="utf-8"?>
+<p:notes xmlns:a="http://schemas.openxmlformats.org/drawingml/2006/main" xmlns:r="http://schemas.openxmlformats.org/officeDocument/2006/relationships" xmlns:p="http://schemas.openxmlformats.org/presentationml/2006/main">
+  <p:cSld>
+    <p:spTree>
+      <p:nvGrpSpPr>
+        <p:cNvPr id="1" name=""/>
+        <p:cNvGrpSpPr/>
+        <p:nvPr/>
+      </p:nvGrpSpPr>
+      <p:grpSpPr>
+        <a:xfrm>
+          <a:off x="0" y="0"/>
+          <a:ext cx="0" cy="0"/>
+          <a:chOff x="0" y="0"/>
+          <a:chExt cx="0" cy="0"/>
+        </a:xfrm>
+      </p:grpSpPr>
+      <p:sp>
+        <p:nvSpPr>
+          <p:cNvPr id="2" name="Slide Image Placeholder 1"/>
+          <p:cNvSpPr>
+            <a:spLocks noGrp="1" noRot="1" noChangeAspect="1"/>
+          </p:cNvSpPr>
+          <p:nvPr>
+            <p:ph type="sldImg"/>
+          </p:nvPr>
+        </p:nvSpPr>
+        <p:spPr/>
+      </p:sp>
+      <p:sp>
+        <p:nvSpPr>
+          <p:cNvPr id="3" name="Notes Placeholder 2"/>
+          <p:cNvSpPr>
+            <a:spLocks noGrp="1"/>
+          </p:cNvSpPr>
+          <p:nvPr>
+            <p:ph type="body" idx="1"/>
+          </p:nvPr>
+        </p:nvSpPr>
+        <p:spPr/>
+        <p:txBody>
+          <a:bodyPr/>
+          <a:lstStyle/>
+          <a:p>
+            <a:r>
+              <a:rPr lang="en-US" dirty="0"/>
+              <a:t/>
+            </a:r>
+            <a:endParaRPr lang="en-US" dirty="0"/>
+          </a:p>
+        </p:txBody>
+      </p:sp>
+      <p:sp>
+        <p:nvSpPr>
+          <p:cNvPr id="4" name="Slide Number Placeholder 3"/>
+          <p:cNvSpPr>
+            <a:spLocks noGrp="1"/>
+          </p:cNvSpPr>
+          <p:nvPr>
+            <p:ph type="sldNum" sz="quarter" idx="10"/>
+          </p:nvPr>
+        </p:nvSpPr>
+        <p:spPr/>
+        <p:txBody>
+          <a:bodyPr/>
+          <a:lstStyle/>
+          <a:p>
+            <a:fld id="{F7021451-1387-4CA6-816F-3879F97B5CBC}" type="slidenum">
+              <a:rPr lang="en-US"/>
+              <a:t>19</a:t>
+            </a:fld>
+            <a:endParaRPr lang="en-US"/>
+          </a:p>
+        </p:txBody>
+      </p:sp>
+    </p:spTree>
+    <p:extLst>
+      <p:ext uri="{BB962C8B-B14F-4D97-AF65-F5344CB8AC3E}">
+        <p14:creationId xmlns:p14="http://schemas.microsoft.com/office/powerpoint/2010/main" val="1024086991"/>
+      </p:ext>
+    </p:extLst>
+  </p:cSld>
+  <p:clrMapOvr>
+    <a:masterClrMapping/>
+  </p:clrMapOvr>
+</p:notes>
+</file>
+
 <file path=ppt/notesSlides/notesSlide2.xml><?xml version="1.0" encoding="utf-8"?>
 <p:notes xmlns:a="http://schemas.openxmlformats.org/drawingml/2006/main" xmlns:r="http://schemas.openxmlformats.org/officeDocument/2006/relationships" xmlns:p="http://schemas.openxmlformats.org/presentationml/2006/main">
   <p:cSld>
@@ -978,6 +1513,94 @@
             <a:fld id="{F7021451-1387-4CA6-816F-3879F97B5CBC}" type="slidenum">
               <a:rPr lang="en-US"/>
               <a:t>2</a:t>
+            </a:fld>
+            <a:endParaRPr lang="en-US"/>
+          </a:p>
+        </p:txBody>
+      </p:sp>
+    </p:spTree>
+    <p:extLst>
+      <p:ext uri="{BB962C8B-B14F-4D97-AF65-F5344CB8AC3E}">
+        <p14:creationId xmlns:p14="http://schemas.microsoft.com/office/powerpoint/2010/main" val="1024086991"/>
+      </p:ext>
+    </p:extLst>
+  </p:cSld>
+  <p:clrMapOvr>
+    <a:masterClrMapping/>
+  </p:clrMapOvr>
+</p:notes>
+</file>
+
+<file path=ppt/notesSlides/notesSlide20.xml><?xml version="1.0" encoding="utf-8"?>
+<p:notes xmlns:a="http://schemas.openxmlformats.org/drawingml/2006/main" xmlns:r="http://schemas.openxmlformats.org/officeDocument/2006/relationships" xmlns:p="http://schemas.openxmlformats.org/presentationml/2006/main">
+  <p:cSld>
+    <p:spTree>
+      <p:nvGrpSpPr>
+        <p:cNvPr id="1" name=""/>
+        <p:cNvGrpSpPr/>
+        <p:nvPr/>
+      </p:nvGrpSpPr>
+      <p:grpSpPr>
+        <a:xfrm>
+          <a:off x="0" y="0"/>
+          <a:ext cx="0" cy="0"/>
+          <a:chOff x="0" y="0"/>
+          <a:chExt cx="0" cy="0"/>
+        </a:xfrm>
+      </p:grpSpPr>
+      <p:sp>
+        <p:nvSpPr>
+          <p:cNvPr id="2" name="Slide Image Placeholder 1"/>
+          <p:cNvSpPr>
+            <a:spLocks noGrp="1" noRot="1" noChangeAspect="1"/>
+          </p:cNvSpPr>
+          <p:nvPr>
+            <p:ph type="sldImg"/>
+          </p:nvPr>
+        </p:nvSpPr>
+        <p:spPr/>
+      </p:sp>
+      <p:sp>
+        <p:nvSpPr>
+          <p:cNvPr id="3" name="Notes Placeholder 2"/>
+          <p:cNvSpPr>
+            <a:spLocks noGrp="1"/>
+          </p:cNvSpPr>
+          <p:nvPr>
+            <p:ph type="body" idx="1"/>
+          </p:nvPr>
+        </p:nvSpPr>
+        <p:spPr/>
+        <p:txBody>
+          <a:bodyPr/>
+          <a:lstStyle/>
+          <a:p>
+            <a:r>
+              <a:rPr lang="en-US" dirty="0"/>
+              <a:t/>
+            </a:r>
+            <a:endParaRPr lang="en-US" dirty="0"/>
+          </a:p>
+        </p:txBody>
+      </p:sp>
+      <p:sp>
+        <p:nvSpPr>
+          <p:cNvPr id="4" name="Slide Number Placeholder 3"/>
+          <p:cNvSpPr>
+            <a:spLocks noGrp="1"/>
+          </p:cNvSpPr>
+          <p:nvPr>
+            <p:ph type="sldNum" sz="quarter" idx="10"/>
+          </p:nvPr>
+        </p:nvSpPr>
+        <p:spPr/>
+        <p:txBody>
+          <a:bodyPr/>
+          <a:lstStyle/>
+          <a:p>
+            <a:fld id="{F7021451-1387-4CA6-816F-3879F97B5CBC}" type="slidenum">
+              <a:rPr lang="en-US"/>
+              <a:t>20</a:t>
             </a:fld>
             <a:endParaRPr lang="en-US"/>
           </a:p>
@@ -2143,102 +2766,6 @@
         </p:nvSpPr>
         <p:spPr>
           <a:xfrm>
-            <a:off x="406301" y="1223963"/>
-            <a:ext cx="8498026" cy="274290"/>
-          </a:xfrm>
-          <a:prstGeom prst="rect">
-            <a:avLst/>
-          </a:prstGeom>
-          <a:noFill/>
-          <a:ln/>
-        </p:spPr>
-        <p:txBody>
-          <a:bodyPr wrap="square" lIns="0" tIns="0" rIns="0" bIns="0" rtlCol="0" anchor="t"/>
-          <a:lstStyle/>
-          <a:p>
-            <a:pPr algn="l" indent="0" marL="0">
-              <a:lnSpc>
-                <a:spcPts val="2160"/>
-              </a:lnSpc>
-              <a:spcBef>
-                <a:spcPts val="600"/>
-              </a:spcBef>
-              <a:spcAft>
-                <a:spcPts val="800"/>
-              </a:spcAft>
-              <a:buNone/>
-            </a:pPr>
-            <a:r>
-              <a:rPr lang="en-US" sz="1800" b="1" dirty="0">
-                <a:solidFill>
-                  <a:srgbClr val="FE4447"/>
-                </a:solidFill>
-                <a:latin typeface="Georgia" pitchFamily="34" charset="0"/>
-                <a:ea typeface="Georgia" pitchFamily="34" charset="-122"/>
-                <a:cs typeface="Georgia" pitchFamily="34" charset="-120"/>
-              </a:rPr>
-              <a:t>Learning objective</a:t>
-            </a:r>
-            <a:endParaRPr lang="en-US" sz="1800" dirty="0"/>
-          </a:p>
-        </p:txBody>
-      </p:sp>
-      <p:sp>
-        <p:nvSpPr>
-          <p:cNvPr id="6" name="Text 4"/>
-          <p:cNvSpPr/>
-          <p:nvPr/>
-        </p:nvSpPr>
-        <p:spPr>
-          <a:xfrm>
-            <a:off x="406301" y="1637854"/>
-            <a:ext cx="8498026" cy="426541"/>
-          </a:xfrm>
-          <a:prstGeom prst="rect">
-            <a:avLst/>
-          </a:prstGeom>
-          <a:noFill/>
-          <a:ln/>
-        </p:spPr>
-        <p:txBody>
-          <a:bodyPr wrap="square" lIns="0" tIns="0" rIns="0" bIns="0" rtlCol="0" anchor="t"/>
-          <a:lstStyle/>
-          <a:p>
-            <a:pPr algn="l" indent="0" marL="0">
-              <a:lnSpc>
-                <a:spcPts val="1680"/>
-              </a:lnSpc>
-              <a:spcBef>
-                <a:spcPts val="300"/>
-              </a:spcBef>
-              <a:spcAft>
-                <a:spcPts val="300"/>
-              </a:spcAft>
-              <a:buNone/>
-            </a:pPr>
-            <a:r>
-              <a:rPr lang="en-US" sz="1200" dirty="0">
-                <a:solidFill>
-                  <a:srgbClr val="1C2833"/>
-                </a:solidFill>
-                <a:latin typeface="Arial" pitchFamily="34" charset="0"/>
-                <a:ea typeface="Arial" pitchFamily="34" charset="-122"/>
-                <a:cs typeface="Arial" pitchFamily="34" charset="-120"/>
-              </a:rPr>
-              <a:t>Students name 3 specific Indian astronomical contributions with their authors/dates and articulate what each got right and what it got wrong.</a:t>
-            </a:r>
-            <a:endParaRPr lang="en-US" sz="1200" dirty="0"/>
-          </a:p>
-        </p:txBody>
-      </p:sp>
-      <p:sp>
-        <p:nvSpPr>
-          <p:cNvPr id="7" name="Text 5"/>
-          <p:cNvSpPr/>
-          <p:nvPr/>
-        </p:nvSpPr>
-        <p:spPr>
-          <a:xfrm>
             <a:off x="406301" y="4434929"/>
             <a:ext cx="8498026" cy="213271"/>
           </a:xfrm>
@@ -2383,7 +2910,7 @@
                 <a:ea typeface="Georgia" pitchFamily="34" charset="-122"/>
                 <a:cs typeface="Georgia" pitchFamily="34" charset="-120"/>
               </a:rPr>
-              <a:t>Homework</a:t>
+              <a:t>Core (25 min) (cont.)</a:t>
             </a:r>
             <a:endParaRPr lang="en-US" sz="1800" dirty="0"/>
           </a:p>
@@ -2398,7 +2925,7 @@
         <p:spPr>
           <a:xfrm>
             <a:off x="406301" y="870942"/>
-            <a:ext cx="8498026" cy="213271"/>
+            <a:ext cx="8498026" cy="426541"/>
           </a:xfrm>
           <a:prstGeom prst="rect">
             <a:avLst/>
@@ -2423,7 +2950,7 @@
               <a:buNone/>
             </a:pPr>
             <a:r>
-              <a:rPr lang="en-US" sz="1200" dirty="0">
+              <a:rPr lang="en-US" sz="1200" b="1" dirty="0">
                 <a:solidFill>
                   <a:srgbClr val="1C2833"/>
                 </a:solidFill>
@@ -2431,7 +2958,76 @@
                 <a:ea typeface="Arial" pitchFamily="34" charset="-122"/>
                 <a:cs typeface="Arial" pitchFamily="34" charset="-120"/>
               </a:rPr>
-              <a:t>– Finalise project plan. Bring all materials tomorrow.</a:t>
+              <a:t>(c) Varāhamihira (~6th c. CE)</a:t>
+            </a:r>
+            <a:pPr algn="l" indent="0" marL="0">
+              <a:lnSpc>
+                <a:spcPts val="1680"/>
+              </a:lnSpc>
+              <a:spcBef>
+                <a:spcPts val="300"/>
+              </a:spcBef>
+              <a:spcAft>
+                <a:spcPts val="300"/>
+              </a:spcAft>
+              <a:buNone/>
+            </a:pPr>
+            <a:r>
+              <a:rPr lang="en-US" sz="1200" dirty="0">
+                <a:solidFill>
+                  <a:srgbClr val="1C2833"/>
+                </a:solidFill>
+                <a:latin typeface="Arial" pitchFamily="34" charset="0"/>
+                <a:ea typeface="Arial" pitchFamily="34" charset="-122"/>
+                <a:cs typeface="Arial" pitchFamily="34" charset="-120"/>
+              </a:rPr>
+              <a:t> — </a:t>
+            </a:r>
+            <a:pPr algn="l" indent="0" marL="0">
+              <a:lnSpc>
+                <a:spcPts val="1680"/>
+              </a:lnSpc>
+              <a:spcBef>
+                <a:spcPts val="300"/>
+              </a:spcBef>
+              <a:spcAft>
+                <a:spcPts val="300"/>
+              </a:spcAft>
+              <a:buNone/>
+            </a:pPr>
+            <a:r>
+              <a:rPr lang="en-US" sz="1200" i="1" dirty="0">
+                <a:solidFill>
+                  <a:srgbClr val="1C2833"/>
+                </a:solidFill>
+                <a:latin typeface="Arial" pitchFamily="34" charset="0"/>
+                <a:ea typeface="Arial" pitchFamily="34" charset="-122"/>
+                <a:cs typeface="Arial" pitchFamily="34" charset="-120"/>
+              </a:rPr>
+              <a:t>Pañca-siddhāntikā</a:t>
+            </a:r>
+            <a:pPr algn="l" indent="0" marL="0">
+              <a:lnSpc>
+                <a:spcPts val="1680"/>
+              </a:lnSpc>
+              <a:spcBef>
+                <a:spcPts val="300"/>
+              </a:spcBef>
+              <a:spcAft>
+                <a:spcPts val="300"/>
+              </a:spcAft>
+              <a:buNone/>
+            </a:pPr>
+            <a:r>
+              <a:rPr lang="en-US" sz="1200" dirty="0">
+                <a:solidFill>
+                  <a:srgbClr val="1C2833"/>
+                </a:solidFill>
+                <a:latin typeface="Arial" pitchFamily="34" charset="0"/>
+                <a:ea typeface="Arial" pitchFamily="34" charset="-122"/>
+                <a:cs typeface="Arial" pitchFamily="34" charset="-120"/>
+              </a:rPr>
+              <a:t>. Compares 5 different astronomical systems including a Greek-derived one. Demonstrates that 6th-c. Indian astronomers were actively engaging with Greek (Yavana) astronomical work.</a:t>
             </a:r>
             <a:endParaRPr lang="en-US" sz="1200" dirty="0"/>
           </a:p>
@@ -2589,7 +3185,7 @@
                 <a:ea typeface="Georgia" pitchFamily="34" charset="-122"/>
                 <a:cs typeface="Georgia" pitchFamily="34" charset="-120"/>
               </a:rPr>
-              <a:t>Differentiation</a:t>
+              <a:t>Core (25 min) (cont.)</a:t>
             </a:r>
             <a:endParaRPr lang="en-US" sz="1800" dirty="0"/>
           </a:p>
@@ -2604,7 +3200,7 @@
         <p:spPr>
           <a:xfrm>
             <a:off x="634901" y="883593"/>
-            <a:ext cx="8102798" cy="525661"/>
+            <a:ext cx="8102798" cy="281880"/>
           </a:xfrm>
           <a:prstGeom prst="rect">
             <a:avLst/>
@@ -2635,16 +3231,42 @@
                 <a:ea typeface="Arial" pitchFamily="34" charset="-122"/>
                 <a:cs typeface="Arial" pitchFamily="34" charset="-120"/>
               </a:rPr>
-              <a:t>Tier up:</a:t>
-            </a:r>
-            <a:pPr algn="l" indent="0" marL="0">
+              <a:t>What Indian astronomy DID well:</a:t>
+            </a:r>
+            <a:endParaRPr lang="en-US" sz="1200" dirty="0"/>
+          </a:p>
+        </p:txBody>
+      </p:sp>
+      <p:sp>
+        <p:nvSpPr>
+          <p:cNvPr id="5" name="Text 3"/>
+          <p:cNvSpPr/>
+          <p:nvPr/>
+        </p:nvSpPr>
+        <p:spPr>
+          <a:xfrm>
+            <a:off x="634901" y="1266974"/>
+            <a:ext cx="8102798" cy="975122"/>
+          </a:xfrm>
+          <a:prstGeom prst="rect">
+            <a:avLst/>
+          </a:prstGeom>
+          <a:noFill/>
+          <a:ln/>
+        </p:spPr>
+        <p:txBody>
+          <a:bodyPr wrap="square" lIns="0" tIns="0" rIns="0" bIns="0" rtlCol="0" anchor="t"/>
+          <a:lstStyle/>
+          <a:p>
+            <a:pPr algn="l" marL="342900" indent="-342900">
               <a:lnSpc>
                 <a:spcPts val="1620"/>
               </a:lnSpc>
               <a:spcAft>
                 <a:spcPts val="300"/>
               </a:spcAft>
-              <a:buNone/>
+              <a:buSzPct val="100000"/>
+              <a:buChar char="•"/>
             </a:pPr>
             <a:r>
               <a:rPr lang="en-US" sz="1200" dirty="0">
@@ -2655,7 +3277,7 @@
                 <a:ea typeface="Arial" pitchFamily="34" charset="-122"/>
                 <a:cs typeface="Arial" pitchFamily="34" charset="-120"/>
               </a:rPr>
-              <a:t> Read about the Yavana (Greek-Indian) interactions in astronomy. Was the influence one-way?</a:t>
+              <a:t>Precise calendar (lunar + solar reconciliation).</a:t>
             </a:r>
             <a:endParaRPr lang="en-US" sz="1200" dirty="0"/>
           </a:p>
@@ -2671,7 +3293,7 @@
               <a:buChar char="•"/>
             </a:pPr>
             <a:r>
-              <a:rPr lang="en-US" sz="1200" b="1" dirty="0">
+              <a:rPr lang="en-US" sz="1200" dirty="0">
                 <a:solidFill>
                   <a:srgbClr val="1C2833"/>
                 </a:solidFill>
@@ -2679,16 +3301,20 @@
                 <a:ea typeface="Arial" pitchFamily="34" charset="-122"/>
                 <a:cs typeface="Arial" pitchFamily="34" charset="-120"/>
               </a:rPr>
-              <a:t>Tier down:</a:t>
-            </a:r>
-            <a:pPr algn="l" indent="0" marL="0">
+              <a:t>Eclipse prediction (eclipses were correctly understood as caused by occlusion, not by the demon Rāhu — though the mythological framing co-existed).</a:t>
+            </a:r>
+            <a:endParaRPr lang="en-US" sz="1200" dirty="0"/>
+          </a:p>
+          <a:p>
+            <a:pPr algn="l" marL="342900" indent="-342900">
               <a:lnSpc>
                 <a:spcPts val="1620"/>
               </a:lnSpc>
               <a:spcAft>
                 <a:spcPts val="300"/>
               </a:spcAft>
-              <a:buNone/>
+              <a:buSzPct val="100000"/>
+              <a:buChar char="•"/>
             </a:pPr>
             <a:r>
               <a:rPr lang="en-US" sz="1200" dirty="0">
@@ -2699,7 +3325,7 @@
                 <a:ea typeface="Arial" pitchFamily="34" charset="-122"/>
                 <a:cs typeface="Arial" pitchFamily="34" charset="-120"/>
               </a:rPr>
-              <a:t> Memorise three names with one fact each.</a:t>
+              <a:t>Trigonometric tables (sines, not chords as in Greek tradition).</a:t>
             </a:r>
             <a:endParaRPr lang="en-US" sz="1200" dirty="0"/>
           </a:p>
@@ -2707,7 +3333,7 @@
       </p:sp>
       <p:sp>
         <p:nvSpPr>
-          <p:cNvPr id="5" name="Text 3"/>
+          <p:cNvPr id="6" name="Text 4"/>
           <p:cNvSpPr/>
           <p:nvPr/>
         </p:nvSpPr>
@@ -2857,7 +3483,7 @@
                 <a:ea typeface="Georgia" pitchFamily="34" charset="-122"/>
                 <a:cs typeface="Georgia" pitchFamily="34" charset="-120"/>
               </a:rPr>
-              <a:t>Teacher notes</a:t>
+              <a:t>Core (25 min) (cont.)</a:t>
             </a:r>
             <a:endParaRPr lang="en-US" sz="1800" dirty="0"/>
           </a:p>
@@ -2871,8 +3497,8 @@
         </p:nvSpPr>
         <p:spPr>
           <a:xfrm>
-            <a:off x="406301" y="870942"/>
-            <a:ext cx="8498026" cy="639812"/>
+            <a:off x="634901" y="883593"/>
+            <a:ext cx="8102798" cy="281880"/>
           </a:xfrm>
           <a:prstGeom prst="rect">
             <a:avLst/>
@@ -2884,20 +3510,18 @@
           <a:bodyPr wrap="square" lIns="0" tIns="0" rIns="0" bIns="0" rtlCol="0" anchor="t"/>
           <a:lstStyle/>
           <a:p>
-            <a:pPr algn="l" indent="0" marL="0">
-              <a:lnSpc>
-                <a:spcPts val="1680"/>
-              </a:lnSpc>
-              <a:spcBef>
-                <a:spcPts val="300"/>
-              </a:spcBef>
-              <a:spcAft>
-                <a:spcPts val="300"/>
-              </a:spcAft>
-              <a:buNone/>
-            </a:pPr>
-            <a:r>
-              <a:rPr lang="en-US" sz="1200" dirty="0">
+            <a:pPr algn="l" marL="342900" indent="-342900">
+              <a:lnSpc>
+                <a:spcPts val="1620"/>
+              </a:lnSpc>
+              <a:spcAft>
+                <a:spcPts val="300"/>
+              </a:spcAft>
+              <a:buSzPct val="100000"/>
+              <a:buChar char="•"/>
+            </a:pPr>
+            <a:r>
+              <a:rPr lang="en-US" sz="1200" b="1" dirty="0">
                 <a:solidFill>
                   <a:srgbClr val="1C2833"/>
                 </a:solidFill>
@@ -2905,7 +3529,7 @@
                 <a:ea typeface="Arial" pitchFamily="34" charset="-122"/>
                 <a:cs typeface="Arial" pitchFamily="34" charset="-120"/>
               </a:rPr>
-              <a:t>– The "Aryabhata predicted earth rotation" claim is mainstream and well-supported. Don't oversell — he didn't propose heliocentrism. – The Yavana-influence question is rich: Indian astronomy genuinely engaged Greek astronomy via the Pañca-siddhāntikā. Both traditions exchanged ideas. Honest history.</a:t>
+              <a:t>What it DIDN'T do:</a:t>
             </a:r>
             <a:endParaRPr lang="en-US" sz="1200" dirty="0"/>
           </a:p>
@@ -2914,6 +3538,76 @@
       <p:sp>
         <p:nvSpPr>
           <p:cNvPr id="5" name="Text 3"/>
+          <p:cNvSpPr/>
+          <p:nvPr/>
+        </p:nvSpPr>
+        <p:spPr>
+          <a:xfrm>
+            <a:off x="634901" y="1266974"/>
+            <a:ext cx="8102798" cy="525661"/>
+          </a:xfrm>
+          <a:prstGeom prst="rect">
+            <a:avLst/>
+          </a:prstGeom>
+          <a:noFill/>
+          <a:ln/>
+        </p:spPr>
+        <p:txBody>
+          <a:bodyPr wrap="square" lIns="0" tIns="0" rIns="0" bIns="0" rtlCol="0" anchor="t"/>
+          <a:lstStyle/>
+          <a:p>
+            <a:pPr algn="l" marL="342900" indent="-342900">
+              <a:lnSpc>
+                <a:spcPts val="1620"/>
+              </a:lnSpc>
+              <a:spcAft>
+                <a:spcPts val="300"/>
+              </a:spcAft>
+              <a:buSzPct val="100000"/>
+              <a:buChar char="•"/>
+            </a:pPr>
+            <a:r>
+              <a:rPr lang="en-US" sz="1200" dirty="0">
+                <a:solidFill>
+                  <a:srgbClr val="1C2833"/>
+                </a:solidFill>
+                <a:latin typeface="Arial" pitchFamily="34" charset="0"/>
+                <a:ea typeface="Arial" pitchFamily="34" charset="-122"/>
+                <a:cs typeface="Arial" pitchFamily="34" charset="-120"/>
+              </a:rPr>
+              <a:t>Did not develop heliocentrism (despite Aryabhata's hint, the geocentric model dominated until modern times).</a:t>
+            </a:r>
+            <a:endParaRPr lang="en-US" sz="1200" dirty="0"/>
+          </a:p>
+          <a:p>
+            <a:pPr algn="l" marL="342900" indent="-342900">
+              <a:lnSpc>
+                <a:spcPts val="1620"/>
+              </a:lnSpc>
+              <a:spcAft>
+                <a:spcPts val="300"/>
+              </a:spcAft>
+              <a:buSzPct val="100000"/>
+              <a:buChar char="•"/>
+            </a:pPr>
+            <a:r>
+              <a:rPr lang="en-US" sz="1200" dirty="0">
+                <a:solidFill>
+                  <a:srgbClr val="1C2833"/>
+                </a:solidFill>
+                <a:latin typeface="Arial" pitchFamily="34" charset="0"/>
+                <a:ea typeface="Arial" pitchFamily="34" charset="-122"/>
+                <a:cs typeface="Arial" pitchFamily="34" charset="-120"/>
+              </a:rPr>
+              <a:t>Did not develop telescopic observation (no telescope until the 17th c. anywhere).</a:t>
+            </a:r>
+            <a:endParaRPr lang="en-US" sz="1200" dirty="0"/>
+          </a:p>
+        </p:txBody>
+      </p:sp>
+      <p:sp>
+        <p:nvSpPr>
+          <p:cNvPr id="6" name="Text 4"/>
           <p:cNvSpPr/>
           <p:nvPr/>
         </p:nvSpPr>
@@ -3063,7 +3757,7 @@
                 <a:ea typeface="Georgia" pitchFamily="34" charset="-122"/>
                 <a:cs typeface="Georgia" pitchFamily="34" charset="-120"/>
               </a:rPr>
-              <a:t>Citation(s) used</a:t>
+              <a:t>Core (25 min) (cont.)</a:t>
             </a:r>
             <a:endParaRPr lang="en-US" sz="1800" dirty="0"/>
           </a:p>
@@ -3077,8 +3771,8 @@
         </p:nvSpPr>
         <p:spPr>
           <a:xfrm>
-            <a:off x="406301" y="870942"/>
-            <a:ext cx="8498026" cy="426541"/>
+            <a:off x="634901" y="883593"/>
+            <a:ext cx="8102798" cy="693241"/>
           </a:xfrm>
           <a:prstGeom prst="rect">
             <a:avLst/>
@@ -3090,20 +3784,18 @@
           <a:bodyPr wrap="square" lIns="0" tIns="0" rIns="0" bIns="0" rtlCol="0" anchor="t"/>
           <a:lstStyle/>
           <a:p>
-            <a:pPr algn="l" indent="0" marL="0">
-              <a:lnSpc>
-                <a:spcPts val="1680"/>
-              </a:lnSpc>
-              <a:spcBef>
-                <a:spcPts val="300"/>
-              </a:spcBef>
-              <a:spcAft>
-                <a:spcPts val="300"/>
-              </a:spcAft>
-              <a:buNone/>
-            </a:pPr>
-            <a:r>
-              <a:rPr lang="en-US" sz="1200" dirty="0">
+            <a:pPr algn="l" marL="342900" indent="-342900">
+              <a:lnSpc>
+                <a:spcPts val="1620"/>
+              </a:lnSpc>
+              <a:spcAft>
+                <a:spcPts val="300"/>
+              </a:spcAft>
+              <a:buSzPct val="100000"/>
+              <a:buChar char="•"/>
+            </a:pPr>
+            <a:r>
+              <a:rPr lang="en-US" sz="1200" b="1" dirty="0">
                 <a:solidFill>
                   <a:srgbClr val="1C2833"/>
                 </a:solidFill>
@@ -3111,22 +3803,19 @@
                 <a:ea typeface="Arial" pitchFamily="34" charset="-122"/>
                 <a:cs typeface="Arial" pitchFamily="34" charset="-120"/>
               </a:rPr>
-              <a:t>– Aryabhaṭīya (499 CE) — Clark (1930) translation. – Plofker (2009), Chapter 4. – Pingree, D. (1996). "Astronomy in India" in </a:t>
+              <a:t>The interesting in-between:</a:t>
             </a:r>
             <a:pPr algn="l" indent="0" marL="0">
               <a:lnSpc>
-                <a:spcPts val="1680"/>
-              </a:lnSpc>
-              <a:spcBef>
-                <a:spcPts val="300"/>
-              </a:spcBef>
-              <a:spcAft>
-                <a:spcPts val="300"/>
-              </a:spcAft>
-              <a:buNone/>
-            </a:pPr>
-            <a:r>
-              <a:rPr lang="en-US" sz="1200" i="1" dirty="0">
+                <a:spcPts val="1620"/>
+              </a:lnSpc>
+              <a:spcAft>
+                <a:spcPts val="300"/>
+              </a:spcAft>
+              <a:buNone/>
+            </a:pPr>
+            <a:r>
+              <a:rPr lang="en-US" sz="1200" dirty="0">
                 <a:solidFill>
                   <a:srgbClr val="1C2833"/>
                 </a:solidFill>
@@ -3134,8 +3823,33 @@
                 <a:ea typeface="Arial" pitchFamily="34" charset="-122"/>
                 <a:cs typeface="Arial" pitchFamily="34" charset="-120"/>
               </a:rPr>
-              <a:t>Astronomy Before the Telescope</a:t>
-            </a:r>
+              <a:t> the Indian astronomical tradition kept astronomy and astrology TOGETHER under jyotiṣa. Calculation skills used to compute eclipses were the same skills used to compute horoscopes. Modern science separates these; the Indian tradition did not.</a:t>
+            </a:r>
+            <a:endParaRPr lang="en-US" sz="1200" dirty="0"/>
+          </a:p>
+        </p:txBody>
+      </p:sp>
+      <p:sp>
+        <p:nvSpPr>
+          <p:cNvPr id="5" name="Text 3"/>
+          <p:cNvSpPr/>
+          <p:nvPr/>
+        </p:nvSpPr>
+        <p:spPr>
+          <a:xfrm>
+            <a:off x="406301" y="4434929"/>
+            <a:ext cx="8498026" cy="213271"/>
+          </a:xfrm>
+          <a:prstGeom prst="rect">
+            <a:avLst/>
+          </a:prstGeom>
+          <a:noFill/>
+          <a:ln/>
+        </p:spPr>
+        <p:txBody>
+          <a:bodyPr wrap="square" lIns="0" tIns="0" rIns="0" bIns="0" rtlCol="0" anchor="t"/>
+          <a:lstStyle/>
+          <a:p>
             <a:pPr algn="l" indent="0" marL="0">
               <a:lnSpc>
                 <a:spcPts val="1680"/>
@@ -3157,7 +3871,1797 @@
                 <a:ea typeface="Arial" pitchFamily="34" charset="-122"/>
                 <a:cs typeface="Arial" pitchFamily="34" charset="-120"/>
               </a:rPr>
-              <a:t>.</a:t>
+              <a:t>Middle ·  · IKS Curriculum</a:t>
+            </a:r>
+            <a:endParaRPr lang="en-US" sz="1200" dirty="0"/>
+          </a:p>
+        </p:txBody>
+      </p:sp>
+    </p:spTree>
+  </p:cSld>
+  <p:clrMapOvr>
+    <a:masterClrMapping/>
+  </p:clrMapOvr>
+</p:sld>
+</file>
+
+<file path=ppt/slides/slide14.xml><?xml version="1.0" encoding="utf-8"?>
+<p:sld xmlns:a="http://schemas.openxmlformats.org/drawingml/2006/main" xmlns:r="http://schemas.openxmlformats.org/officeDocument/2006/relationships" xmlns:p="http://schemas.openxmlformats.org/presentationml/2006/main">
+  <p:cSld name="Slide 14">
+    <p:bg>
+      <p:bgPr>
+        <a:solidFill>
+          <a:srgbClr val="FFFFFF"/>
+        </a:solidFill>
+      </p:bgPr>
+    </p:bg>
+    <p:spTree>
+      <p:nvGrpSpPr>
+        <p:cNvPr id="1" name=""/>
+        <p:cNvGrpSpPr/>
+        <p:nvPr/>
+      </p:nvGrpSpPr>
+      <p:grpSpPr>
+        <a:xfrm>
+          <a:off x="0" y="0"/>
+          <a:ext cx="0" cy="0"/>
+          <a:chOff x="0" y="0"/>
+          <a:chExt cx="0" cy="0"/>
+        </a:xfrm>
+      </p:grpSpPr>
+      <p:sp>
+        <p:nvSpPr>
+          <p:cNvPr id="2" name="Text 0"/>
+          <p:cNvSpPr/>
+          <p:nvPr/>
+        </p:nvSpPr>
+        <p:spPr>
+          <a:xfrm>
+            <a:off x="0" y="0"/>
+            <a:ext cx="9144000" cy="101501"/>
+          </a:xfrm>
+          <a:prstGeom prst="rect">
+            <a:avLst/>
+          </a:prstGeom>
+          <a:solidFill>
+            <a:srgbClr val="277884"/>
+          </a:solidFill>
+          <a:ln/>
+        </p:spPr>
+        <p:txBody>
+          <a:bodyPr wrap="square" rtlCol="0" anchor="ctr"/>
+          <a:lstStyle/>
+          <a:p>
+            <a:pPr indent="0" marL="0">
+              <a:buNone/>
+            </a:pPr>
+            <a:endParaRPr lang="en-US" dirty="0"/>
+          </a:p>
+        </p:txBody>
+      </p:sp>
+      <p:sp>
+        <p:nvSpPr>
+          <p:cNvPr id="3" name="Text 1"/>
+          <p:cNvSpPr/>
+          <p:nvPr/>
+        </p:nvSpPr>
+        <p:spPr>
+          <a:xfrm>
+            <a:off x="406301" y="457051"/>
+            <a:ext cx="8498026" cy="274290"/>
+          </a:xfrm>
+          <a:prstGeom prst="rect">
+            <a:avLst/>
+          </a:prstGeom>
+          <a:noFill/>
+          <a:ln/>
+        </p:spPr>
+        <p:txBody>
+          <a:bodyPr wrap="square" lIns="0" tIns="0" rIns="0" bIns="0" rtlCol="0" anchor="t"/>
+          <a:lstStyle/>
+          <a:p>
+            <a:pPr algn="l" indent="0" marL="0">
+              <a:lnSpc>
+                <a:spcPts val="2160"/>
+              </a:lnSpc>
+              <a:spcBef>
+                <a:spcPts val="600"/>
+              </a:spcBef>
+              <a:spcAft>
+                <a:spcPts val="800"/>
+              </a:spcAft>
+              <a:buNone/>
+            </a:pPr>
+            <a:r>
+              <a:rPr lang="en-US" sz="1800" b="1" dirty="0">
+                <a:solidFill>
+                  <a:srgbClr val="FE4447"/>
+                </a:solidFill>
+                <a:latin typeface="Georgia" pitchFamily="34" charset="0"/>
+                <a:ea typeface="Georgia" pitchFamily="34" charset="-122"/>
+                <a:cs typeface="Georgia" pitchFamily="34" charset="-120"/>
+              </a:rPr>
+              <a:t>Activity (10 min) — Aryabhata's earth-rotation argument</a:t>
+            </a:r>
+            <a:endParaRPr lang="en-US" sz="1800" dirty="0"/>
+          </a:p>
+        </p:txBody>
+      </p:sp>
+      <p:sp>
+        <p:nvSpPr>
+          <p:cNvPr id="4" name="Text 2"/>
+          <p:cNvSpPr/>
+          <p:nvPr/>
+        </p:nvSpPr>
+        <p:spPr>
+          <a:xfrm>
+            <a:off x="406301" y="870942"/>
+            <a:ext cx="8498026" cy="213271"/>
+          </a:xfrm>
+          <a:prstGeom prst="rect">
+            <a:avLst/>
+          </a:prstGeom>
+          <a:noFill/>
+          <a:ln/>
+        </p:spPr>
+        <p:txBody>
+          <a:bodyPr wrap="square" lIns="0" tIns="0" rIns="0" bIns="0" rtlCol="0" anchor="t"/>
+          <a:lstStyle/>
+          <a:p>
+            <a:pPr algn="l" indent="0" marL="0">
+              <a:lnSpc>
+                <a:spcPts val="1680"/>
+              </a:lnSpc>
+              <a:spcBef>
+                <a:spcPts val="300"/>
+              </a:spcBef>
+              <a:spcAft>
+                <a:spcPts val="300"/>
+              </a:spcAft>
+              <a:buNone/>
+            </a:pPr>
+            <a:r>
+              <a:rPr lang="en-US" sz="1200" dirty="0">
+                <a:solidFill>
+                  <a:srgbClr val="1C2833"/>
+                </a:solidFill>
+                <a:latin typeface="Arial" pitchFamily="34" charset="0"/>
+                <a:ea typeface="Arial" pitchFamily="34" charset="-122"/>
+                <a:cs typeface="Arial" pitchFamily="34" charset="-120"/>
+              </a:rPr>
+              <a:t>Demonstrate with a globe (or a ball with a marked point):</a:t>
+            </a:r>
+            <a:endParaRPr lang="en-US" sz="1200" dirty="0"/>
+          </a:p>
+        </p:txBody>
+      </p:sp>
+      <p:sp>
+        <p:nvSpPr>
+          <p:cNvPr id="5" name="Text 3"/>
+          <p:cNvSpPr/>
+          <p:nvPr/>
+        </p:nvSpPr>
+        <p:spPr>
+          <a:xfrm>
+            <a:off x="634901" y="1173063"/>
+            <a:ext cx="8102798" cy="769441"/>
+          </a:xfrm>
+          <a:prstGeom prst="rect">
+            <a:avLst/>
+          </a:prstGeom>
+          <a:noFill/>
+          <a:ln/>
+        </p:spPr>
+        <p:txBody>
+          <a:bodyPr wrap="square" lIns="0" tIns="0" rIns="0" bIns="0" rtlCol="0" anchor="t"/>
+          <a:lstStyle/>
+          <a:p>
+            <a:pPr algn="l" marL="342900" indent="-342900">
+              <a:lnSpc>
+                <a:spcPts val="1620"/>
+              </a:lnSpc>
+              <a:spcAft>
+                <a:spcPts val="300"/>
+              </a:spcAft>
+              <a:buSzPct val="100000"/>
+              <a:buChar char="•"/>
+            </a:pPr>
+            <a:r>
+              <a:rPr lang="en-US" sz="1200" dirty="0">
+                <a:solidFill>
+                  <a:srgbClr val="1C2833"/>
+                </a:solidFill>
+                <a:latin typeface="Arial" pitchFamily="34" charset="0"/>
+                <a:ea typeface="Arial" pitchFamily="34" charset="-122"/>
+                <a:cs typeface="Arial" pitchFamily="34" charset="-120"/>
+              </a:rPr>
+              <a:t>Set the ball spinning. From the spinner's point of view, the room "rotates" around them.</a:t>
+            </a:r>
+            <a:endParaRPr lang="en-US" sz="1200" dirty="0"/>
+          </a:p>
+          <a:p>
+            <a:pPr algn="l" marL="342900" indent="-342900">
+              <a:lnSpc>
+                <a:spcPts val="1620"/>
+              </a:lnSpc>
+              <a:spcAft>
+                <a:spcPts val="300"/>
+              </a:spcAft>
+              <a:buSzPct val="100000"/>
+              <a:buChar char="•"/>
+            </a:pPr>
+            <a:r>
+              <a:rPr lang="en-US" sz="1200" dirty="0">
+                <a:solidFill>
+                  <a:srgbClr val="1C2833"/>
+                </a:solidFill>
+                <a:latin typeface="Arial" pitchFamily="34" charset="0"/>
+                <a:ea typeface="Arial" pitchFamily="34" charset="-122"/>
+                <a:cs typeface="Arial" pitchFamily="34" charset="-120"/>
+              </a:rPr>
+              <a:t>Aryabhata reasoned: maybe the stars don't rotate around us; maybe WE rotate.</a:t>
+            </a:r>
+            <a:endParaRPr lang="en-US" sz="1200" dirty="0"/>
+          </a:p>
+          <a:p>
+            <a:pPr algn="l" marL="342900" indent="-342900">
+              <a:lnSpc>
+                <a:spcPts val="1620"/>
+              </a:lnSpc>
+              <a:spcAft>
+                <a:spcPts val="300"/>
+              </a:spcAft>
+              <a:buSzPct val="100000"/>
+              <a:buChar char="•"/>
+            </a:pPr>
+            <a:r>
+              <a:rPr lang="en-US" sz="1200" dirty="0">
+                <a:solidFill>
+                  <a:srgbClr val="1C2833"/>
+                </a:solidFill>
+                <a:latin typeface="Arial" pitchFamily="34" charset="0"/>
+                <a:ea typeface="Arial" pitchFamily="34" charset="-122"/>
+                <a:cs typeface="Arial" pitchFamily="34" charset="-120"/>
+              </a:rPr>
+              <a:t>This was the correct answer. He was a thousand years ahead of European thinkers on this specific point.</a:t>
+            </a:r>
+            <a:endParaRPr lang="en-US" sz="1200" dirty="0"/>
+          </a:p>
+        </p:txBody>
+      </p:sp>
+      <p:sp>
+        <p:nvSpPr>
+          <p:cNvPr id="6" name="Text 4"/>
+          <p:cNvSpPr/>
+          <p:nvPr/>
+        </p:nvSpPr>
+        <p:spPr>
+          <a:xfrm>
+            <a:off x="406301" y="4434929"/>
+            <a:ext cx="8498026" cy="213271"/>
+          </a:xfrm>
+          <a:prstGeom prst="rect">
+            <a:avLst/>
+          </a:prstGeom>
+          <a:noFill/>
+          <a:ln/>
+        </p:spPr>
+        <p:txBody>
+          <a:bodyPr wrap="square" lIns="0" tIns="0" rIns="0" bIns="0" rtlCol="0" anchor="t"/>
+          <a:lstStyle/>
+          <a:p>
+            <a:pPr algn="l" indent="0" marL="0">
+              <a:lnSpc>
+                <a:spcPts val="1680"/>
+              </a:lnSpc>
+              <a:spcBef>
+                <a:spcPts val="300"/>
+              </a:spcBef>
+              <a:spcAft>
+                <a:spcPts val="300"/>
+              </a:spcAft>
+              <a:buNone/>
+            </a:pPr>
+            <a:r>
+              <a:rPr lang="en-US" sz="1200" dirty="0">
+                <a:solidFill>
+                  <a:srgbClr val="1C2833"/>
+                </a:solidFill>
+                <a:latin typeface="Arial" pitchFamily="34" charset="0"/>
+                <a:ea typeface="Arial" pitchFamily="34" charset="-122"/>
+                <a:cs typeface="Arial" pitchFamily="34" charset="-120"/>
+              </a:rPr>
+              <a:t>Middle ·  · IKS Curriculum</a:t>
+            </a:r>
+            <a:endParaRPr lang="en-US" sz="1200" dirty="0"/>
+          </a:p>
+        </p:txBody>
+      </p:sp>
+    </p:spTree>
+  </p:cSld>
+  <p:clrMapOvr>
+    <a:masterClrMapping/>
+  </p:clrMapOvr>
+</p:sld>
+</file>
+
+<file path=ppt/slides/slide15.xml><?xml version="1.0" encoding="utf-8"?>
+<p:sld xmlns:a="http://schemas.openxmlformats.org/drawingml/2006/main" xmlns:r="http://schemas.openxmlformats.org/officeDocument/2006/relationships" xmlns:p="http://schemas.openxmlformats.org/presentationml/2006/main">
+  <p:cSld name="Slide 15">
+    <p:bg>
+      <p:bgPr>
+        <a:solidFill>
+          <a:srgbClr val="FFFFFF"/>
+        </a:solidFill>
+      </p:bgPr>
+    </p:bg>
+    <p:spTree>
+      <p:nvGrpSpPr>
+        <p:cNvPr id="1" name=""/>
+        <p:cNvGrpSpPr/>
+        <p:nvPr/>
+      </p:nvGrpSpPr>
+      <p:grpSpPr>
+        <a:xfrm>
+          <a:off x="0" y="0"/>
+          <a:ext cx="0" cy="0"/>
+          <a:chOff x="0" y="0"/>
+          <a:chExt cx="0" cy="0"/>
+        </a:xfrm>
+      </p:grpSpPr>
+      <p:sp>
+        <p:nvSpPr>
+          <p:cNvPr id="2" name="Text 0"/>
+          <p:cNvSpPr/>
+          <p:nvPr/>
+        </p:nvSpPr>
+        <p:spPr>
+          <a:xfrm>
+            <a:off x="0" y="0"/>
+            <a:ext cx="9144000" cy="101501"/>
+          </a:xfrm>
+          <a:prstGeom prst="rect">
+            <a:avLst/>
+          </a:prstGeom>
+          <a:solidFill>
+            <a:srgbClr val="277884"/>
+          </a:solidFill>
+          <a:ln/>
+        </p:spPr>
+        <p:txBody>
+          <a:bodyPr wrap="square" rtlCol="0" anchor="ctr"/>
+          <a:lstStyle/>
+          <a:p>
+            <a:pPr indent="0" marL="0">
+              <a:buNone/>
+            </a:pPr>
+            <a:endParaRPr lang="en-US" dirty="0"/>
+          </a:p>
+        </p:txBody>
+      </p:sp>
+      <p:sp>
+        <p:nvSpPr>
+          <p:cNvPr id="3" name="Text 1"/>
+          <p:cNvSpPr/>
+          <p:nvPr/>
+        </p:nvSpPr>
+        <p:spPr>
+          <a:xfrm>
+            <a:off x="406301" y="457051"/>
+            <a:ext cx="8498026" cy="274290"/>
+          </a:xfrm>
+          <a:prstGeom prst="rect">
+            <a:avLst/>
+          </a:prstGeom>
+          <a:noFill/>
+          <a:ln/>
+        </p:spPr>
+        <p:txBody>
+          <a:bodyPr wrap="square" lIns="0" tIns="0" rIns="0" bIns="0" rtlCol="0" anchor="t"/>
+          <a:lstStyle/>
+          <a:p>
+            <a:pPr algn="l" indent="0" marL="0">
+              <a:lnSpc>
+                <a:spcPts val="2160"/>
+              </a:lnSpc>
+              <a:spcBef>
+                <a:spcPts val="600"/>
+              </a:spcBef>
+              <a:spcAft>
+                <a:spcPts val="800"/>
+              </a:spcAft>
+              <a:buNone/>
+            </a:pPr>
+            <a:r>
+              <a:rPr lang="en-US" sz="1800" b="1" dirty="0">
+                <a:solidFill>
+                  <a:srgbClr val="FE4447"/>
+                </a:solidFill>
+                <a:latin typeface="Georgia" pitchFamily="34" charset="0"/>
+                <a:ea typeface="Georgia" pitchFamily="34" charset="-122"/>
+                <a:cs typeface="Georgia" pitchFamily="34" charset="-120"/>
+              </a:rPr>
+              <a:t>Wrap-up (5 min)</a:t>
+            </a:r>
+            <a:endParaRPr lang="en-US" sz="1800" dirty="0"/>
+          </a:p>
+        </p:txBody>
+      </p:sp>
+      <p:sp>
+        <p:nvSpPr>
+          <p:cNvPr id="4" name="Text 2"/>
+          <p:cNvSpPr/>
+          <p:nvPr/>
+        </p:nvSpPr>
+        <p:spPr>
+          <a:xfrm>
+            <a:off x="634901" y="883593"/>
+            <a:ext cx="8102798" cy="281880"/>
+          </a:xfrm>
+          <a:prstGeom prst="rect">
+            <a:avLst/>
+          </a:prstGeom>
+          <a:noFill/>
+          <a:ln/>
+        </p:spPr>
+        <p:txBody>
+          <a:bodyPr wrap="square" lIns="0" tIns="0" rIns="0" bIns="0" rtlCol="0" anchor="t"/>
+          <a:lstStyle/>
+          <a:p>
+            <a:pPr algn="l" marL="342900" indent="-342900">
+              <a:lnSpc>
+                <a:spcPts val="1620"/>
+              </a:lnSpc>
+              <a:spcAft>
+                <a:spcPts val="300"/>
+              </a:spcAft>
+              <a:buSzPct val="100000"/>
+              <a:buChar char="•"/>
+            </a:pPr>
+            <a:r>
+              <a:rPr lang="en-US" sz="1200" dirty="0">
+                <a:solidFill>
+                  <a:srgbClr val="1C2833"/>
+                </a:solidFill>
+                <a:latin typeface="Arial" pitchFamily="34" charset="0"/>
+                <a:ea typeface="Arial" pitchFamily="34" charset="-122"/>
+                <a:cs typeface="Arial" pitchFamily="34" charset="-120"/>
+              </a:rPr>
+              <a:t>Preview Day 8: </a:t>
+            </a:r>
+            <a:pPr algn="l" indent="0" marL="0">
+              <a:lnSpc>
+                <a:spcPts val="1620"/>
+              </a:lnSpc>
+              <a:spcAft>
+                <a:spcPts val="300"/>
+              </a:spcAft>
+              <a:buNone/>
+            </a:pPr>
+            <a:r>
+              <a:rPr lang="en-US" sz="1200" i="1" dirty="0">
+                <a:solidFill>
+                  <a:srgbClr val="1C2833"/>
+                </a:solidFill>
+                <a:latin typeface="Arial" pitchFamily="34" charset="0"/>
+                <a:ea typeface="Arial" pitchFamily="34" charset="-122"/>
+                <a:cs typeface="Arial" pitchFamily="34" charset="-120"/>
+              </a:rPr>
+              <a:t>"Project work begins tomorrow."</a:t>
+            </a:r>
+            <a:endParaRPr lang="en-US" sz="1200" dirty="0"/>
+          </a:p>
+        </p:txBody>
+      </p:sp>
+      <p:sp>
+        <p:nvSpPr>
+          <p:cNvPr id="5" name="Text 3"/>
+          <p:cNvSpPr/>
+          <p:nvPr/>
+        </p:nvSpPr>
+        <p:spPr>
+          <a:xfrm>
+            <a:off x="406301" y="4434929"/>
+            <a:ext cx="8498026" cy="213271"/>
+          </a:xfrm>
+          <a:prstGeom prst="rect">
+            <a:avLst/>
+          </a:prstGeom>
+          <a:noFill/>
+          <a:ln/>
+        </p:spPr>
+        <p:txBody>
+          <a:bodyPr wrap="square" lIns="0" tIns="0" rIns="0" bIns="0" rtlCol="0" anchor="t"/>
+          <a:lstStyle/>
+          <a:p>
+            <a:pPr algn="l" indent="0" marL="0">
+              <a:lnSpc>
+                <a:spcPts val="1680"/>
+              </a:lnSpc>
+              <a:spcBef>
+                <a:spcPts val="300"/>
+              </a:spcBef>
+              <a:spcAft>
+                <a:spcPts val="300"/>
+              </a:spcAft>
+              <a:buNone/>
+            </a:pPr>
+            <a:r>
+              <a:rPr lang="en-US" sz="1200" dirty="0">
+                <a:solidFill>
+                  <a:srgbClr val="1C2833"/>
+                </a:solidFill>
+                <a:latin typeface="Arial" pitchFamily="34" charset="0"/>
+                <a:ea typeface="Arial" pitchFamily="34" charset="-122"/>
+                <a:cs typeface="Arial" pitchFamily="34" charset="-120"/>
+              </a:rPr>
+              <a:t>Middle ·  · IKS Curriculum</a:t>
+            </a:r>
+            <a:endParaRPr lang="en-US" sz="1200" dirty="0"/>
+          </a:p>
+        </p:txBody>
+      </p:sp>
+    </p:spTree>
+  </p:cSld>
+  <p:clrMapOvr>
+    <a:masterClrMapping/>
+  </p:clrMapOvr>
+</p:sld>
+</file>
+
+<file path=ppt/slides/slide16.xml><?xml version="1.0" encoding="utf-8"?>
+<p:sld xmlns:a="http://schemas.openxmlformats.org/drawingml/2006/main" xmlns:r="http://schemas.openxmlformats.org/officeDocument/2006/relationships" xmlns:p="http://schemas.openxmlformats.org/presentationml/2006/main">
+  <p:cSld name="Slide 16">
+    <p:bg>
+      <p:bgPr>
+        <a:solidFill>
+          <a:srgbClr val="FFFFFF"/>
+        </a:solidFill>
+      </p:bgPr>
+    </p:bg>
+    <p:spTree>
+      <p:nvGrpSpPr>
+        <p:cNvPr id="1" name=""/>
+        <p:cNvGrpSpPr/>
+        <p:nvPr/>
+      </p:nvGrpSpPr>
+      <p:grpSpPr>
+        <a:xfrm>
+          <a:off x="0" y="0"/>
+          <a:ext cx="0" cy="0"/>
+          <a:chOff x="0" y="0"/>
+          <a:chExt cx="0" cy="0"/>
+        </a:xfrm>
+      </p:grpSpPr>
+      <p:sp>
+        <p:nvSpPr>
+          <p:cNvPr id="2" name="Text 0"/>
+          <p:cNvSpPr/>
+          <p:nvPr/>
+        </p:nvSpPr>
+        <p:spPr>
+          <a:xfrm>
+            <a:off x="0" y="0"/>
+            <a:ext cx="9144000" cy="101501"/>
+          </a:xfrm>
+          <a:prstGeom prst="rect">
+            <a:avLst/>
+          </a:prstGeom>
+          <a:solidFill>
+            <a:srgbClr val="277884"/>
+          </a:solidFill>
+          <a:ln/>
+        </p:spPr>
+        <p:txBody>
+          <a:bodyPr wrap="square" rtlCol="0" anchor="ctr"/>
+          <a:lstStyle/>
+          <a:p>
+            <a:pPr indent="0" marL="0">
+              <a:buNone/>
+            </a:pPr>
+            <a:endParaRPr lang="en-US" dirty="0"/>
+          </a:p>
+        </p:txBody>
+      </p:sp>
+      <p:sp>
+        <p:nvSpPr>
+          <p:cNvPr id="3" name="Text 1"/>
+          <p:cNvSpPr/>
+          <p:nvPr/>
+        </p:nvSpPr>
+        <p:spPr>
+          <a:xfrm>
+            <a:off x="406301" y="457051"/>
+            <a:ext cx="8498026" cy="274290"/>
+          </a:xfrm>
+          <a:prstGeom prst="rect">
+            <a:avLst/>
+          </a:prstGeom>
+          <a:noFill/>
+          <a:ln/>
+        </p:spPr>
+        <p:txBody>
+          <a:bodyPr wrap="square" lIns="0" tIns="0" rIns="0" bIns="0" rtlCol="0" anchor="t"/>
+          <a:lstStyle/>
+          <a:p>
+            <a:pPr algn="l" indent="0" marL="0">
+              <a:lnSpc>
+                <a:spcPts val="2160"/>
+              </a:lnSpc>
+              <a:spcBef>
+                <a:spcPts val="600"/>
+              </a:spcBef>
+              <a:spcAft>
+                <a:spcPts val="800"/>
+              </a:spcAft>
+              <a:buNone/>
+            </a:pPr>
+            <a:r>
+              <a:rPr lang="en-US" sz="1800" b="1" dirty="0">
+                <a:solidFill>
+                  <a:srgbClr val="FE4447"/>
+                </a:solidFill>
+                <a:latin typeface="Georgia" pitchFamily="34" charset="0"/>
+                <a:ea typeface="Georgia" pitchFamily="34" charset="-122"/>
+                <a:cs typeface="Georgia" pitchFamily="34" charset="-120"/>
+              </a:rPr>
+              <a:t>Student-facing content</a:t>
+            </a:r>
+            <a:endParaRPr lang="en-US" sz="1800" dirty="0"/>
+          </a:p>
+        </p:txBody>
+      </p:sp>
+      <p:sp>
+        <p:nvSpPr>
+          <p:cNvPr id="4" name="Text 2"/>
+          <p:cNvSpPr/>
+          <p:nvPr/>
+        </p:nvSpPr>
+        <p:spPr>
+          <a:xfrm>
+            <a:off x="406301" y="883593"/>
+            <a:ext cx="8331398" cy="2419350"/>
+          </a:xfrm>
+          <a:prstGeom prst="rect">
+            <a:avLst/>
+          </a:prstGeom>
+          <a:solidFill>
+            <a:srgbClr val="F4F8F9"/>
+          </a:solidFill>
+          <a:ln/>
+        </p:spPr>
+        <p:txBody>
+          <a:bodyPr wrap="square" rtlCol="0" anchor="ctr"/>
+          <a:lstStyle/>
+          <a:p>
+            <a:pPr indent="0" marL="0">
+              <a:buNone/>
+            </a:pPr>
+            <a:endParaRPr lang="en-US" dirty="0"/>
+          </a:p>
+        </p:txBody>
+      </p:sp>
+      <p:sp>
+        <p:nvSpPr>
+          <p:cNvPr id="5" name="Shape 3"/>
+          <p:cNvSpPr/>
+          <p:nvPr/>
+        </p:nvSpPr>
+        <p:spPr>
+          <a:xfrm>
+            <a:off x="434876" y="883593"/>
+            <a:ext cx="0" cy="2419350"/>
+          </a:xfrm>
+          <a:prstGeom prst="line">
+            <a:avLst/>
+          </a:prstGeom>
+          <a:noFill/>
+          <a:ln w="57150">
+            <a:solidFill>
+              <a:srgbClr val="FE4447"/>
+            </a:solidFill>
+            <a:prstDash val="solid"/>
+          </a:ln>
+        </p:spPr>
+      </p:sp>
+      <p:sp>
+        <p:nvSpPr>
+          <p:cNvPr id="6" name="Text 4"/>
+          <p:cNvSpPr/>
+          <p:nvPr/>
+        </p:nvSpPr>
+        <p:spPr>
+          <a:xfrm>
+            <a:off x="692051" y="1074093"/>
+            <a:ext cx="7973389" cy="230981"/>
+          </a:xfrm>
+          <a:prstGeom prst="rect">
+            <a:avLst/>
+          </a:prstGeom>
+          <a:noFill/>
+          <a:ln/>
+        </p:spPr>
+        <p:txBody>
+          <a:bodyPr wrap="square" lIns="0" tIns="0" rIns="0" bIns="0" rtlCol="0" anchor="t"/>
+          <a:lstStyle/>
+          <a:p>
+            <a:pPr algn="l" indent="0" marL="0">
+              <a:lnSpc>
+                <a:spcPts val="1820"/>
+              </a:lnSpc>
+              <a:spcBef>
+                <a:spcPts val="300"/>
+              </a:spcBef>
+              <a:spcAft>
+                <a:spcPts val="300"/>
+              </a:spcAft>
+              <a:buNone/>
+            </a:pPr>
+            <a:r>
+              <a:rPr lang="en-US" sz="1300" b="1" i="1" dirty="0">
+                <a:solidFill>
+                  <a:srgbClr val="1C2833"/>
+                </a:solidFill>
+                <a:latin typeface="Georgia" pitchFamily="34" charset="0"/>
+                <a:ea typeface="Georgia" pitchFamily="34" charset="-122"/>
+                <a:cs typeface="Georgia" pitchFamily="34" charset="-120"/>
+              </a:rPr>
+              <a:t>Three Indian Astronomical Contributions</a:t>
+            </a:r>
+            <a:endParaRPr lang="en-US" sz="1300" dirty="0"/>
+          </a:p>
+        </p:txBody>
+      </p:sp>
+      <p:sp>
+        <p:nvSpPr>
+          <p:cNvPr id="7" name="Text 5"/>
+          <p:cNvSpPr/>
+          <p:nvPr/>
+        </p:nvSpPr>
+        <p:spPr>
+          <a:xfrm>
+            <a:off x="692051" y="1343174"/>
+            <a:ext cx="7973389" cy="461963"/>
+          </a:xfrm>
+          <a:prstGeom prst="rect">
+            <a:avLst/>
+          </a:prstGeom>
+          <a:noFill/>
+          <a:ln/>
+        </p:spPr>
+        <p:txBody>
+          <a:bodyPr wrap="square" lIns="0" tIns="0" rIns="0" bIns="0" rtlCol="0" anchor="t"/>
+          <a:lstStyle/>
+          <a:p>
+            <a:pPr algn="l" indent="0" marL="0">
+              <a:lnSpc>
+                <a:spcPts val="1820"/>
+              </a:lnSpc>
+              <a:spcBef>
+                <a:spcPts val="300"/>
+              </a:spcBef>
+              <a:spcAft>
+                <a:spcPts val="300"/>
+              </a:spcAft>
+              <a:buNone/>
+            </a:pPr>
+            <a:r>
+              <a:rPr lang="en-US" sz="1300" b="1" i="1" dirty="0">
+                <a:solidFill>
+                  <a:srgbClr val="1C2833"/>
+                </a:solidFill>
+                <a:latin typeface="Georgia" pitchFamily="34" charset="0"/>
+                <a:ea typeface="Georgia" pitchFamily="34" charset="-122"/>
+                <a:cs typeface="Georgia" pitchFamily="34" charset="-120"/>
+              </a:rPr>
+              <a:t>Aryabhata (~500 CE)</a:t>
+            </a:r>
+            <a:pPr algn="l" indent="0" marL="0">
+              <a:lnSpc>
+                <a:spcPts val="1820"/>
+              </a:lnSpc>
+              <a:spcBef>
+                <a:spcPts val="300"/>
+              </a:spcBef>
+              <a:spcAft>
+                <a:spcPts val="300"/>
+              </a:spcAft>
+              <a:buNone/>
+            </a:pPr>
+            <a:r>
+              <a:rPr lang="en-US" sz="1300" dirty="0">
+                <a:solidFill>
+                  <a:srgbClr val="1C2833"/>
+                </a:solidFill>
+                <a:latin typeface="Georgia" pitchFamily="34" charset="0"/>
+                <a:ea typeface="Georgia" pitchFamily="34" charset="-122"/>
+                <a:cs typeface="Georgia" pitchFamily="34" charset="-120"/>
+              </a:rPr>
+              <a:t> — proposed earth rotates on its axis; computed π to 4 decimals; predicted eclipses.</a:t>
+            </a:r>
+            <a:endParaRPr lang="en-US" sz="1300" dirty="0"/>
+          </a:p>
+        </p:txBody>
+      </p:sp>
+      <p:sp>
+        <p:nvSpPr>
+          <p:cNvPr id="8" name="Text 6"/>
+          <p:cNvSpPr/>
+          <p:nvPr/>
+        </p:nvSpPr>
+        <p:spPr>
+          <a:xfrm>
+            <a:off x="692051" y="1843236"/>
+            <a:ext cx="7973389" cy="230981"/>
+          </a:xfrm>
+          <a:prstGeom prst="rect">
+            <a:avLst/>
+          </a:prstGeom>
+          <a:noFill/>
+          <a:ln/>
+        </p:spPr>
+        <p:txBody>
+          <a:bodyPr wrap="square" lIns="0" tIns="0" rIns="0" bIns="0" rtlCol="0" anchor="t"/>
+          <a:lstStyle/>
+          <a:p>
+            <a:pPr algn="l" indent="0" marL="0">
+              <a:lnSpc>
+                <a:spcPts val="1820"/>
+              </a:lnSpc>
+              <a:spcBef>
+                <a:spcPts val="300"/>
+              </a:spcBef>
+              <a:spcAft>
+                <a:spcPts val="300"/>
+              </a:spcAft>
+              <a:buNone/>
+            </a:pPr>
+            <a:r>
+              <a:rPr lang="en-US" sz="1300" b="1" i="1" dirty="0">
+                <a:solidFill>
+                  <a:srgbClr val="1C2833"/>
+                </a:solidFill>
+                <a:latin typeface="Georgia" pitchFamily="34" charset="0"/>
+                <a:ea typeface="Georgia" pitchFamily="34" charset="-122"/>
+                <a:cs typeface="Georgia" pitchFamily="34" charset="-120"/>
+              </a:rPr>
+              <a:t>Sūrya-siddhānta (early CE)</a:t>
+            </a:r>
+            <a:pPr algn="l" indent="0" marL="0">
+              <a:lnSpc>
+                <a:spcPts val="1820"/>
+              </a:lnSpc>
+              <a:spcBef>
+                <a:spcPts val="300"/>
+              </a:spcBef>
+              <a:spcAft>
+                <a:spcPts val="300"/>
+              </a:spcAft>
+              <a:buNone/>
+            </a:pPr>
+            <a:r>
+              <a:rPr lang="en-US" sz="1300" dirty="0">
+                <a:solidFill>
+                  <a:srgbClr val="1C2833"/>
+                </a:solidFill>
+                <a:latin typeface="Georgia" pitchFamily="34" charset="0"/>
+                <a:ea typeface="Georgia" pitchFamily="34" charset="-122"/>
+                <a:cs typeface="Georgia" pitchFamily="34" charset="-120"/>
+              </a:rPr>
+              <a:t> — planetary calculations + earth's circumference to ~1% accuracy.</a:t>
+            </a:r>
+            <a:endParaRPr lang="en-US" sz="1300" dirty="0"/>
+          </a:p>
+        </p:txBody>
+      </p:sp>
+      <p:sp>
+        <p:nvSpPr>
+          <p:cNvPr id="9" name="Text 7"/>
+          <p:cNvSpPr/>
+          <p:nvPr/>
+        </p:nvSpPr>
+        <p:spPr>
+          <a:xfrm>
+            <a:off x="692051" y="2112318"/>
+            <a:ext cx="7973389" cy="461963"/>
+          </a:xfrm>
+          <a:prstGeom prst="rect">
+            <a:avLst/>
+          </a:prstGeom>
+          <a:noFill/>
+          <a:ln/>
+        </p:spPr>
+        <p:txBody>
+          <a:bodyPr wrap="square" lIns="0" tIns="0" rIns="0" bIns="0" rtlCol="0" anchor="t"/>
+          <a:lstStyle/>
+          <a:p>
+            <a:pPr algn="l" indent="0" marL="0">
+              <a:lnSpc>
+                <a:spcPts val="1820"/>
+              </a:lnSpc>
+              <a:spcBef>
+                <a:spcPts val="300"/>
+              </a:spcBef>
+              <a:spcAft>
+                <a:spcPts val="300"/>
+              </a:spcAft>
+              <a:buNone/>
+            </a:pPr>
+            <a:r>
+              <a:rPr lang="en-US" sz="1300" b="1" i="1" dirty="0">
+                <a:solidFill>
+                  <a:srgbClr val="1C2833"/>
+                </a:solidFill>
+                <a:latin typeface="Georgia" pitchFamily="34" charset="0"/>
+                <a:ea typeface="Georgia" pitchFamily="34" charset="-122"/>
+                <a:cs typeface="Georgia" pitchFamily="34" charset="-120"/>
+              </a:rPr>
+              <a:t>Varāhamihira (~6th c. CE)</a:t>
+            </a:r>
+            <a:pPr algn="l" indent="0" marL="0">
+              <a:lnSpc>
+                <a:spcPts val="1820"/>
+              </a:lnSpc>
+              <a:spcBef>
+                <a:spcPts val="300"/>
+              </a:spcBef>
+              <a:spcAft>
+                <a:spcPts val="300"/>
+              </a:spcAft>
+              <a:buNone/>
+            </a:pPr>
+            <a:r>
+              <a:rPr lang="en-US" sz="1300" dirty="0">
+                <a:solidFill>
+                  <a:srgbClr val="1C2833"/>
+                </a:solidFill>
+                <a:latin typeface="Georgia" pitchFamily="34" charset="0"/>
+                <a:ea typeface="Georgia" pitchFamily="34" charset="-122"/>
+                <a:cs typeface="Georgia" pitchFamily="34" charset="-120"/>
+              </a:rPr>
+              <a:t> — </a:t>
+            </a:r>
+            <a:pPr algn="l" indent="0" marL="0">
+              <a:lnSpc>
+                <a:spcPts val="1820"/>
+              </a:lnSpc>
+              <a:spcBef>
+                <a:spcPts val="300"/>
+              </a:spcBef>
+              <a:spcAft>
+                <a:spcPts val="300"/>
+              </a:spcAft>
+              <a:buNone/>
+            </a:pPr>
+            <a:r>
+              <a:rPr lang="en-US" sz="1300" i="1" dirty="0">
+                <a:solidFill>
+                  <a:srgbClr val="1C2833"/>
+                </a:solidFill>
+                <a:latin typeface="Georgia" pitchFamily="34" charset="0"/>
+                <a:ea typeface="Georgia" pitchFamily="34" charset="-122"/>
+                <a:cs typeface="Georgia" pitchFamily="34" charset="-120"/>
+              </a:rPr>
+              <a:t>Pañca-siddhāntikā</a:t>
+            </a:r>
+            <a:pPr algn="l" indent="0" marL="0">
+              <a:lnSpc>
+                <a:spcPts val="1820"/>
+              </a:lnSpc>
+              <a:spcBef>
+                <a:spcPts val="300"/>
+              </a:spcBef>
+              <a:spcAft>
+                <a:spcPts val="300"/>
+              </a:spcAft>
+              <a:buNone/>
+            </a:pPr>
+            <a:r>
+              <a:rPr lang="en-US" sz="1300" dirty="0">
+                <a:solidFill>
+                  <a:srgbClr val="1C2833"/>
+                </a:solidFill>
+                <a:latin typeface="Georgia" pitchFamily="34" charset="0"/>
+                <a:ea typeface="Georgia" pitchFamily="34" charset="-122"/>
+                <a:cs typeface="Georgia" pitchFamily="34" charset="-120"/>
+              </a:rPr>
+              <a:t> compared 5 astronomical systems including Greek-derived ones.</a:t>
+            </a:r>
+            <a:endParaRPr lang="en-US" sz="1300" dirty="0"/>
+          </a:p>
+        </p:txBody>
+      </p:sp>
+      <p:sp>
+        <p:nvSpPr>
+          <p:cNvPr id="10" name="Text 8"/>
+          <p:cNvSpPr/>
+          <p:nvPr/>
+        </p:nvSpPr>
+        <p:spPr>
+          <a:xfrm>
+            <a:off x="692051" y="2612380"/>
+            <a:ext cx="7973389" cy="230981"/>
+          </a:xfrm>
+          <a:prstGeom prst="rect">
+            <a:avLst/>
+          </a:prstGeom>
+          <a:noFill/>
+          <a:ln/>
+        </p:spPr>
+        <p:txBody>
+          <a:bodyPr wrap="square" lIns="0" tIns="0" rIns="0" bIns="0" rtlCol="0" anchor="t"/>
+          <a:lstStyle/>
+          <a:p>
+            <a:pPr algn="l" indent="0" marL="0">
+              <a:lnSpc>
+                <a:spcPts val="1820"/>
+              </a:lnSpc>
+              <a:spcBef>
+                <a:spcPts val="300"/>
+              </a:spcBef>
+              <a:spcAft>
+                <a:spcPts val="300"/>
+              </a:spcAft>
+              <a:buNone/>
+            </a:pPr>
+            <a:r>
+              <a:rPr lang="en-US" sz="1300" i="1" dirty="0">
+                <a:solidFill>
+                  <a:srgbClr val="1C2833"/>
+                </a:solidFill>
+                <a:latin typeface="Georgia" pitchFamily="34" charset="0"/>
+                <a:ea typeface="Georgia" pitchFamily="34" charset="-122"/>
+                <a:cs typeface="Georgia" pitchFamily="34" charset="-120"/>
+              </a:rPr>
+              <a:t>Aryabhata's earth-rotation claim was ~1000 years ahead of European thinkers on that specific point.</a:t>
+            </a:r>
+            <a:endParaRPr lang="en-US" sz="1300" dirty="0"/>
+          </a:p>
+        </p:txBody>
+      </p:sp>
+      <p:sp>
+        <p:nvSpPr>
+          <p:cNvPr id="11" name="Text 9"/>
+          <p:cNvSpPr/>
+          <p:nvPr/>
+        </p:nvSpPr>
+        <p:spPr>
+          <a:xfrm>
+            <a:off x="692051" y="2881461"/>
+            <a:ext cx="7973389" cy="230981"/>
+          </a:xfrm>
+          <a:prstGeom prst="rect">
+            <a:avLst/>
+          </a:prstGeom>
+          <a:noFill/>
+          <a:ln/>
+        </p:spPr>
+        <p:txBody>
+          <a:bodyPr wrap="square" lIns="0" tIns="0" rIns="0" bIns="0" rtlCol="0" anchor="t"/>
+          <a:lstStyle/>
+          <a:p>
+            <a:pPr algn="l" indent="0" marL="0">
+              <a:lnSpc>
+                <a:spcPts val="1820"/>
+              </a:lnSpc>
+              <a:spcBef>
+                <a:spcPts val="300"/>
+              </a:spcBef>
+              <a:spcAft>
+                <a:spcPts val="300"/>
+              </a:spcAft>
+              <a:buNone/>
+            </a:pPr>
+            <a:r>
+              <a:rPr lang="en-US" sz="1300" i="1" dirty="0">
+                <a:solidFill>
+                  <a:srgbClr val="1C2833"/>
+                </a:solidFill>
+                <a:latin typeface="Georgia" pitchFamily="34" charset="0"/>
+                <a:ea typeface="Georgia" pitchFamily="34" charset="-122"/>
+                <a:cs typeface="Georgia" pitchFamily="34" charset="-120"/>
+              </a:rPr>
+              <a:t>Note: Indian astronomy did NOT develop heliocentrism (Copernicus, 1500s) or telescopes (17th c.).</a:t>
+            </a:r>
+            <a:endParaRPr lang="en-US" sz="1300" dirty="0"/>
+          </a:p>
+        </p:txBody>
+      </p:sp>
+      <p:sp>
+        <p:nvSpPr>
+          <p:cNvPr id="12" name="Text 10"/>
+          <p:cNvSpPr/>
+          <p:nvPr/>
+        </p:nvSpPr>
+        <p:spPr>
+          <a:xfrm>
+            <a:off x="406301" y="4434929"/>
+            <a:ext cx="8498026" cy="213271"/>
+          </a:xfrm>
+          <a:prstGeom prst="rect">
+            <a:avLst/>
+          </a:prstGeom>
+          <a:noFill/>
+          <a:ln/>
+        </p:spPr>
+        <p:txBody>
+          <a:bodyPr wrap="square" lIns="0" tIns="0" rIns="0" bIns="0" rtlCol="0" anchor="t"/>
+          <a:lstStyle/>
+          <a:p>
+            <a:pPr algn="l" indent="0" marL="0">
+              <a:lnSpc>
+                <a:spcPts val="1680"/>
+              </a:lnSpc>
+              <a:spcBef>
+                <a:spcPts val="300"/>
+              </a:spcBef>
+              <a:spcAft>
+                <a:spcPts val="300"/>
+              </a:spcAft>
+              <a:buNone/>
+            </a:pPr>
+            <a:r>
+              <a:rPr lang="en-US" sz="1200" dirty="0">
+                <a:solidFill>
+                  <a:srgbClr val="1C2833"/>
+                </a:solidFill>
+                <a:latin typeface="Arial" pitchFamily="34" charset="0"/>
+                <a:ea typeface="Arial" pitchFamily="34" charset="-122"/>
+                <a:cs typeface="Arial" pitchFamily="34" charset="-120"/>
+              </a:rPr>
+              <a:t>Middle ·  · IKS Curriculum</a:t>
+            </a:r>
+            <a:endParaRPr lang="en-US" sz="1200" dirty="0"/>
+          </a:p>
+        </p:txBody>
+      </p:sp>
+    </p:spTree>
+  </p:cSld>
+  <p:clrMapOvr>
+    <a:masterClrMapping/>
+  </p:clrMapOvr>
+</p:sld>
+</file>
+
+<file path=ppt/slides/slide17.xml><?xml version="1.0" encoding="utf-8"?>
+<p:sld xmlns:a="http://schemas.openxmlformats.org/drawingml/2006/main" xmlns:r="http://schemas.openxmlformats.org/officeDocument/2006/relationships" xmlns:p="http://schemas.openxmlformats.org/presentationml/2006/main">
+  <p:cSld name="Slide 17">
+    <p:bg>
+      <p:bgPr>
+        <a:solidFill>
+          <a:srgbClr val="FFFFFF"/>
+        </a:solidFill>
+      </p:bgPr>
+    </p:bg>
+    <p:spTree>
+      <p:nvGrpSpPr>
+        <p:cNvPr id="1" name=""/>
+        <p:cNvGrpSpPr/>
+        <p:nvPr/>
+      </p:nvGrpSpPr>
+      <p:grpSpPr>
+        <a:xfrm>
+          <a:off x="0" y="0"/>
+          <a:ext cx="0" cy="0"/>
+          <a:chOff x="0" y="0"/>
+          <a:chExt cx="0" cy="0"/>
+        </a:xfrm>
+      </p:grpSpPr>
+      <p:sp>
+        <p:nvSpPr>
+          <p:cNvPr id="2" name="Text 0"/>
+          <p:cNvSpPr/>
+          <p:nvPr/>
+        </p:nvSpPr>
+        <p:spPr>
+          <a:xfrm>
+            <a:off x="0" y="0"/>
+            <a:ext cx="9144000" cy="101501"/>
+          </a:xfrm>
+          <a:prstGeom prst="rect">
+            <a:avLst/>
+          </a:prstGeom>
+          <a:solidFill>
+            <a:srgbClr val="277884"/>
+          </a:solidFill>
+          <a:ln/>
+        </p:spPr>
+        <p:txBody>
+          <a:bodyPr wrap="square" rtlCol="0" anchor="ctr"/>
+          <a:lstStyle/>
+          <a:p>
+            <a:pPr indent="0" marL="0">
+              <a:buNone/>
+            </a:pPr>
+            <a:endParaRPr lang="en-US" dirty="0"/>
+          </a:p>
+        </p:txBody>
+      </p:sp>
+      <p:sp>
+        <p:nvSpPr>
+          <p:cNvPr id="3" name="Text 1"/>
+          <p:cNvSpPr/>
+          <p:nvPr/>
+        </p:nvSpPr>
+        <p:spPr>
+          <a:xfrm>
+            <a:off x="406301" y="457051"/>
+            <a:ext cx="8498026" cy="274290"/>
+          </a:xfrm>
+          <a:prstGeom prst="rect">
+            <a:avLst/>
+          </a:prstGeom>
+          <a:noFill/>
+          <a:ln/>
+        </p:spPr>
+        <p:txBody>
+          <a:bodyPr wrap="square" lIns="0" tIns="0" rIns="0" bIns="0" rtlCol="0" anchor="t"/>
+          <a:lstStyle/>
+          <a:p>
+            <a:pPr algn="l" indent="0" marL="0">
+              <a:lnSpc>
+                <a:spcPts val="2160"/>
+              </a:lnSpc>
+              <a:spcBef>
+                <a:spcPts val="600"/>
+              </a:spcBef>
+              <a:spcAft>
+                <a:spcPts val="800"/>
+              </a:spcAft>
+              <a:buNone/>
+            </a:pPr>
+            <a:r>
+              <a:rPr lang="en-US" sz="1800" b="1" dirty="0">
+                <a:solidFill>
+                  <a:srgbClr val="FE4447"/>
+                </a:solidFill>
+                <a:latin typeface="Georgia" pitchFamily="34" charset="0"/>
+                <a:ea typeface="Georgia" pitchFamily="34" charset="-122"/>
+                <a:cs typeface="Georgia" pitchFamily="34" charset="-120"/>
+              </a:rPr>
+              <a:t>Homework</a:t>
+            </a:r>
+            <a:endParaRPr lang="en-US" sz="1800" dirty="0"/>
+          </a:p>
+        </p:txBody>
+      </p:sp>
+      <p:sp>
+        <p:nvSpPr>
+          <p:cNvPr id="4" name="Text 2"/>
+          <p:cNvSpPr/>
+          <p:nvPr/>
+        </p:nvSpPr>
+        <p:spPr>
+          <a:xfrm>
+            <a:off x="634901" y="883593"/>
+            <a:ext cx="8102798" cy="281880"/>
+          </a:xfrm>
+          <a:prstGeom prst="rect">
+            <a:avLst/>
+          </a:prstGeom>
+          <a:noFill/>
+          <a:ln/>
+        </p:spPr>
+        <p:txBody>
+          <a:bodyPr wrap="square" lIns="0" tIns="0" rIns="0" bIns="0" rtlCol="0" anchor="t"/>
+          <a:lstStyle/>
+          <a:p>
+            <a:pPr algn="l" marL="342900" indent="-342900">
+              <a:lnSpc>
+                <a:spcPts val="1620"/>
+              </a:lnSpc>
+              <a:spcAft>
+                <a:spcPts val="300"/>
+              </a:spcAft>
+              <a:buSzPct val="100000"/>
+              <a:buChar char="•"/>
+            </a:pPr>
+            <a:r>
+              <a:rPr lang="en-US" sz="1200" dirty="0">
+                <a:solidFill>
+                  <a:srgbClr val="1C2833"/>
+                </a:solidFill>
+                <a:latin typeface="Arial" pitchFamily="34" charset="0"/>
+                <a:ea typeface="Arial" pitchFamily="34" charset="-122"/>
+                <a:cs typeface="Arial" pitchFamily="34" charset="-120"/>
+              </a:rPr>
+              <a:t>Finalise project plan. Bring all materials tomorrow.</a:t>
+            </a:r>
+            <a:endParaRPr lang="en-US" sz="1200" dirty="0"/>
+          </a:p>
+        </p:txBody>
+      </p:sp>
+      <p:sp>
+        <p:nvSpPr>
+          <p:cNvPr id="5" name="Text 3"/>
+          <p:cNvSpPr/>
+          <p:nvPr/>
+        </p:nvSpPr>
+        <p:spPr>
+          <a:xfrm>
+            <a:off x="406301" y="4434929"/>
+            <a:ext cx="8498026" cy="213271"/>
+          </a:xfrm>
+          <a:prstGeom prst="rect">
+            <a:avLst/>
+          </a:prstGeom>
+          <a:noFill/>
+          <a:ln/>
+        </p:spPr>
+        <p:txBody>
+          <a:bodyPr wrap="square" lIns="0" tIns="0" rIns="0" bIns="0" rtlCol="0" anchor="t"/>
+          <a:lstStyle/>
+          <a:p>
+            <a:pPr algn="l" indent="0" marL="0">
+              <a:lnSpc>
+                <a:spcPts val="1680"/>
+              </a:lnSpc>
+              <a:spcBef>
+                <a:spcPts val="300"/>
+              </a:spcBef>
+              <a:spcAft>
+                <a:spcPts val="300"/>
+              </a:spcAft>
+              <a:buNone/>
+            </a:pPr>
+            <a:r>
+              <a:rPr lang="en-US" sz="1200" dirty="0">
+                <a:solidFill>
+                  <a:srgbClr val="1C2833"/>
+                </a:solidFill>
+                <a:latin typeface="Arial" pitchFamily="34" charset="0"/>
+                <a:ea typeface="Arial" pitchFamily="34" charset="-122"/>
+                <a:cs typeface="Arial" pitchFamily="34" charset="-120"/>
+              </a:rPr>
+              <a:t>Middle ·  · IKS Curriculum</a:t>
+            </a:r>
+            <a:endParaRPr lang="en-US" sz="1200" dirty="0"/>
+          </a:p>
+        </p:txBody>
+      </p:sp>
+    </p:spTree>
+  </p:cSld>
+  <p:clrMapOvr>
+    <a:masterClrMapping/>
+  </p:clrMapOvr>
+</p:sld>
+</file>
+
+<file path=ppt/slides/slide18.xml><?xml version="1.0" encoding="utf-8"?>
+<p:sld xmlns:a="http://schemas.openxmlformats.org/drawingml/2006/main" xmlns:r="http://schemas.openxmlformats.org/officeDocument/2006/relationships" xmlns:p="http://schemas.openxmlformats.org/presentationml/2006/main">
+  <p:cSld name="Slide 18">
+    <p:bg>
+      <p:bgPr>
+        <a:solidFill>
+          <a:srgbClr val="FFFFFF"/>
+        </a:solidFill>
+      </p:bgPr>
+    </p:bg>
+    <p:spTree>
+      <p:nvGrpSpPr>
+        <p:cNvPr id="1" name=""/>
+        <p:cNvGrpSpPr/>
+        <p:nvPr/>
+      </p:nvGrpSpPr>
+      <p:grpSpPr>
+        <a:xfrm>
+          <a:off x="0" y="0"/>
+          <a:ext cx="0" cy="0"/>
+          <a:chOff x="0" y="0"/>
+          <a:chExt cx="0" cy="0"/>
+        </a:xfrm>
+      </p:grpSpPr>
+      <p:sp>
+        <p:nvSpPr>
+          <p:cNvPr id="2" name="Text 0"/>
+          <p:cNvSpPr/>
+          <p:nvPr/>
+        </p:nvSpPr>
+        <p:spPr>
+          <a:xfrm>
+            <a:off x="0" y="0"/>
+            <a:ext cx="9144000" cy="101501"/>
+          </a:xfrm>
+          <a:prstGeom prst="rect">
+            <a:avLst/>
+          </a:prstGeom>
+          <a:solidFill>
+            <a:srgbClr val="277884"/>
+          </a:solidFill>
+          <a:ln/>
+        </p:spPr>
+        <p:txBody>
+          <a:bodyPr wrap="square" rtlCol="0" anchor="ctr"/>
+          <a:lstStyle/>
+          <a:p>
+            <a:pPr indent="0" marL="0">
+              <a:buNone/>
+            </a:pPr>
+            <a:endParaRPr lang="en-US" dirty="0"/>
+          </a:p>
+        </p:txBody>
+      </p:sp>
+      <p:sp>
+        <p:nvSpPr>
+          <p:cNvPr id="3" name="Text 1"/>
+          <p:cNvSpPr/>
+          <p:nvPr/>
+        </p:nvSpPr>
+        <p:spPr>
+          <a:xfrm>
+            <a:off x="406301" y="457051"/>
+            <a:ext cx="8498026" cy="274290"/>
+          </a:xfrm>
+          <a:prstGeom prst="rect">
+            <a:avLst/>
+          </a:prstGeom>
+          <a:noFill/>
+          <a:ln/>
+        </p:spPr>
+        <p:txBody>
+          <a:bodyPr wrap="square" lIns="0" tIns="0" rIns="0" bIns="0" rtlCol="0" anchor="t"/>
+          <a:lstStyle/>
+          <a:p>
+            <a:pPr algn="l" indent="0" marL="0">
+              <a:lnSpc>
+                <a:spcPts val="2160"/>
+              </a:lnSpc>
+              <a:spcBef>
+                <a:spcPts val="600"/>
+              </a:spcBef>
+              <a:spcAft>
+                <a:spcPts val="800"/>
+              </a:spcAft>
+              <a:buNone/>
+            </a:pPr>
+            <a:r>
+              <a:rPr lang="en-US" sz="1800" b="1" dirty="0">
+                <a:solidFill>
+                  <a:srgbClr val="FE4447"/>
+                </a:solidFill>
+                <a:latin typeface="Georgia" pitchFamily="34" charset="0"/>
+                <a:ea typeface="Georgia" pitchFamily="34" charset="-122"/>
+                <a:cs typeface="Georgia" pitchFamily="34" charset="-120"/>
+              </a:rPr>
+              <a:t>Differentiation</a:t>
+            </a:r>
+            <a:endParaRPr lang="en-US" sz="1800" dirty="0"/>
+          </a:p>
+        </p:txBody>
+      </p:sp>
+      <p:sp>
+        <p:nvSpPr>
+          <p:cNvPr id="4" name="Text 2"/>
+          <p:cNvSpPr/>
+          <p:nvPr/>
+        </p:nvSpPr>
+        <p:spPr>
+          <a:xfrm>
+            <a:off x="634901" y="883593"/>
+            <a:ext cx="8102798" cy="525661"/>
+          </a:xfrm>
+          <a:prstGeom prst="rect">
+            <a:avLst/>
+          </a:prstGeom>
+          <a:noFill/>
+          <a:ln/>
+        </p:spPr>
+        <p:txBody>
+          <a:bodyPr wrap="square" lIns="0" tIns="0" rIns="0" bIns="0" rtlCol="0" anchor="t"/>
+          <a:lstStyle/>
+          <a:p>
+            <a:pPr algn="l" marL="342900" indent="-342900">
+              <a:lnSpc>
+                <a:spcPts val="1620"/>
+              </a:lnSpc>
+              <a:spcAft>
+                <a:spcPts val="300"/>
+              </a:spcAft>
+              <a:buSzPct val="100000"/>
+              <a:buChar char="•"/>
+            </a:pPr>
+            <a:r>
+              <a:rPr lang="en-US" sz="1200" b="1" dirty="0">
+                <a:solidFill>
+                  <a:srgbClr val="1C2833"/>
+                </a:solidFill>
+                <a:latin typeface="Arial" pitchFamily="34" charset="0"/>
+                <a:ea typeface="Arial" pitchFamily="34" charset="-122"/>
+                <a:cs typeface="Arial" pitchFamily="34" charset="-120"/>
+              </a:rPr>
+              <a:t>Tier up:</a:t>
+            </a:r>
+            <a:pPr algn="l" indent="0" marL="0">
+              <a:lnSpc>
+                <a:spcPts val="1620"/>
+              </a:lnSpc>
+              <a:spcAft>
+                <a:spcPts val="300"/>
+              </a:spcAft>
+              <a:buNone/>
+            </a:pPr>
+            <a:r>
+              <a:rPr lang="en-US" sz="1200" dirty="0">
+                <a:solidFill>
+                  <a:srgbClr val="1C2833"/>
+                </a:solidFill>
+                <a:latin typeface="Arial" pitchFamily="34" charset="0"/>
+                <a:ea typeface="Arial" pitchFamily="34" charset="-122"/>
+                <a:cs typeface="Arial" pitchFamily="34" charset="-120"/>
+              </a:rPr>
+              <a:t> Read about the Yavana (Greek-Indian) interactions in astronomy. Was the influence one-way?</a:t>
+            </a:r>
+            <a:endParaRPr lang="en-US" sz="1200" dirty="0"/>
+          </a:p>
+          <a:p>
+            <a:pPr algn="l" marL="342900" indent="-342900">
+              <a:lnSpc>
+                <a:spcPts val="1620"/>
+              </a:lnSpc>
+              <a:spcAft>
+                <a:spcPts val="300"/>
+              </a:spcAft>
+              <a:buSzPct val="100000"/>
+              <a:buChar char="•"/>
+            </a:pPr>
+            <a:r>
+              <a:rPr lang="en-US" sz="1200" b="1" dirty="0">
+                <a:solidFill>
+                  <a:srgbClr val="1C2833"/>
+                </a:solidFill>
+                <a:latin typeface="Arial" pitchFamily="34" charset="0"/>
+                <a:ea typeface="Arial" pitchFamily="34" charset="-122"/>
+                <a:cs typeface="Arial" pitchFamily="34" charset="-120"/>
+              </a:rPr>
+              <a:t>Tier down:</a:t>
+            </a:r>
+            <a:pPr algn="l" indent="0" marL="0">
+              <a:lnSpc>
+                <a:spcPts val="1620"/>
+              </a:lnSpc>
+              <a:spcAft>
+                <a:spcPts val="300"/>
+              </a:spcAft>
+              <a:buNone/>
+            </a:pPr>
+            <a:r>
+              <a:rPr lang="en-US" sz="1200" dirty="0">
+                <a:solidFill>
+                  <a:srgbClr val="1C2833"/>
+                </a:solidFill>
+                <a:latin typeface="Arial" pitchFamily="34" charset="0"/>
+                <a:ea typeface="Arial" pitchFamily="34" charset="-122"/>
+                <a:cs typeface="Arial" pitchFamily="34" charset="-120"/>
+              </a:rPr>
+              <a:t> Memorise three names with one fact each.</a:t>
+            </a:r>
+            <a:endParaRPr lang="en-US" sz="1200" dirty="0"/>
+          </a:p>
+        </p:txBody>
+      </p:sp>
+      <p:sp>
+        <p:nvSpPr>
+          <p:cNvPr id="5" name="Text 3"/>
+          <p:cNvSpPr/>
+          <p:nvPr/>
+        </p:nvSpPr>
+        <p:spPr>
+          <a:xfrm>
+            <a:off x="406301" y="4434929"/>
+            <a:ext cx="8498026" cy="213271"/>
+          </a:xfrm>
+          <a:prstGeom prst="rect">
+            <a:avLst/>
+          </a:prstGeom>
+          <a:noFill/>
+          <a:ln/>
+        </p:spPr>
+        <p:txBody>
+          <a:bodyPr wrap="square" lIns="0" tIns="0" rIns="0" bIns="0" rtlCol="0" anchor="t"/>
+          <a:lstStyle/>
+          <a:p>
+            <a:pPr algn="l" indent="0" marL="0">
+              <a:lnSpc>
+                <a:spcPts val="1680"/>
+              </a:lnSpc>
+              <a:spcBef>
+                <a:spcPts val="300"/>
+              </a:spcBef>
+              <a:spcAft>
+                <a:spcPts val="300"/>
+              </a:spcAft>
+              <a:buNone/>
+            </a:pPr>
+            <a:r>
+              <a:rPr lang="en-US" sz="1200" dirty="0">
+                <a:solidFill>
+                  <a:srgbClr val="1C2833"/>
+                </a:solidFill>
+                <a:latin typeface="Arial" pitchFamily="34" charset="0"/>
+                <a:ea typeface="Arial" pitchFamily="34" charset="-122"/>
+                <a:cs typeface="Arial" pitchFamily="34" charset="-120"/>
+              </a:rPr>
+              <a:t>Middle ·  · IKS Curriculum</a:t>
+            </a:r>
+            <a:endParaRPr lang="en-US" sz="1200" dirty="0"/>
+          </a:p>
+        </p:txBody>
+      </p:sp>
+    </p:spTree>
+  </p:cSld>
+  <p:clrMapOvr>
+    <a:masterClrMapping/>
+  </p:clrMapOvr>
+</p:sld>
+</file>
+
+<file path=ppt/slides/slide19.xml><?xml version="1.0" encoding="utf-8"?>
+<p:sld xmlns:a="http://schemas.openxmlformats.org/drawingml/2006/main" xmlns:r="http://schemas.openxmlformats.org/officeDocument/2006/relationships" xmlns:p="http://schemas.openxmlformats.org/presentationml/2006/main">
+  <p:cSld name="Slide 19">
+    <p:bg>
+      <p:bgPr>
+        <a:solidFill>
+          <a:srgbClr val="FFFFFF"/>
+        </a:solidFill>
+      </p:bgPr>
+    </p:bg>
+    <p:spTree>
+      <p:nvGrpSpPr>
+        <p:cNvPr id="1" name=""/>
+        <p:cNvGrpSpPr/>
+        <p:nvPr/>
+      </p:nvGrpSpPr>
+      <p:grpSpPr>
+        <a:xfrm>
+          <a:off x="0" y="0"/>
+          <a:ext cx="0" cy="0"/>
+          <a:chOff x="0" y="0"/>
+          <a:chExt cx="0" cy="0"/>
+        </a:xfrm>
+      </p:grpSpPr>
+      <p:sp>
+        <p:nvSpPr>
+          <p:cNvPr id="2" name="Text 0"/>
+          <p:cNvSpPr/>
+          <p:nvPr/>
+        </p:nvSpPr>
+        <p:spPr>
+          <a:xfrm>
+            <a:off x="0" y="0"/>
+            <a:ext cx="9144000" cy="101501"/>
+          </a:xfrm>
+          <a:prstGeom prst="rect">
+            <a:avLst/>
+          </a:prstGeom>
+          <a:solidFill>
+            <a:srgbClr val="277884"/>
+          </a:solidFill>
+          <a:ln/>
+        </p:spPr>
+        <p:txBody>
+          <a:bodyPr wrap="square" rtlCol="0" anchor="ctr"/>
+          <a:lstStyle/>
+          <a:p>
+            <a:pPr indent="0" marL="0">
+              <a:buNone/>
+            </a:pPr>
+            <a:endParaRPr lang="en-US" dirty="0"/>
+          </a:p>
+        </p:txBody>
+      </p:sp>
+      <p:sp>
+        <p:nvSpPr>
+          <p:cNvPr id="3" name="Text 1"/>
+          <p:cNvSpPr/>
+          <p:nvPr/>
+        </p:nvSpPr>
+        <p:spPr>
+          <a:xfrm>
+            <a:off x="406301" y="457051"/>
+            <a:ext cx="8498026" cy="274290"/>
+          </a:xfrm>
+          <a:prstGeom prst="rect">
+            <a:avLst/>
+          </a:prstGeom>
+          <a:noFill/>
+          <a:ln/>
+        </p:spPr>
+        <p:txBody>
+          <a:bodyPr wrap="square" lIns="0" tIns="0" rIns="0" bIns="0" rtlCol="0" anchor="t"/>
+          <a:lstStyle/>
+          <a:p>
+            <a:pPr algn="l" indent="0" marL="0">
+              <a:lnSpc>
+                <a:spcPts val="2160"/>
+              </a:lnSpc>
+              <a:spcBef>
+                <a:spcPts val="600"/>
+              </a:spcBef>
+              <a:spcAft>
+                <a:spcPts val="800"/>
+              </a:spcAft>
+              <a:buNone/>
+            </a:pPr>
+            <a:r>
+              <a:rPr lang="en-US" sz="1800" b="1" dirty="0">
+                <a:solidFill>
+                  <a:srgbClr val="FE4447"/>
+                </a:solidFill>
+                <a:latin typeface="Georgia" pitchFamily="34" charset="0"/>
+                <a:ea typeface="Georgia" pitchFamily="34" charset="-122"/>
+                <a:cs typeface="Georgia" pitchFamily="34" charset="-120"/>
+              </a:rPr>
+              <a:t>Teacher notes</a:t>
+            </a:r>
+            <a:endParaRPr lang="en-US" sz="1800" dirty="0"/>
+          </a:p>
+        </p:txBody>
+      </p:sp>
+      <p:sp>
+        <p:nvSpPr>
+          <p:cNvPr id="4" name="Text 2"/>
+          <p:cNvSpPr/>
+          <p:nvPr/>
+        </p:nvSpPr>
+        <p:spPr>
+          <a:xfrm>
+            <a:off x="634901" y="883593"/>
+            <a:ext cx="8102798" cy="937022"/>
+          </a:xfrm>
+          <a:prstGeom prst="rect">
+            <a:avLst/>
+          </a:prstGeom>
+          <a:noFill/>
+          <a:ln/>
+        </p:spPr>
+        <p:txBody>
+          <a:bodyPr wrap="square" lIns="0" tIns="0" rIns="0" bIns="0" rtlCol="0" anchor="t"/>
+          <a:lstStyle/>
+          <a:p>
+            <a:pPr algn="l" marL="342900" indent="-342900">
+              <a:lnSpc>
+                <a:spcPts val="1620"/>
+              </a:lnSpc>
+              <a:spcAft>
+                <a:spcPts val="300"/>
+              </a:spcAft>
+              <a:buSzPct val="100000"/>
+              <a:buChar char="•"/>
+            </a:pPr>
+            <a:r>
+              <a:rPr lang="en-US" sz="1200" dirty="0">
+                <a:solidFill>
+                  <a:srgbClr val="1C2833"/>
+                </a:solidFill>
+                <a:latin typeface="Arial" pitchFamily="34" charset="0"/>
+                <a:ea typeface="Arial" pitchFamily="34" charset="-122"/>
+                <a:cs typeface="Arial" pitchFamily="34" charset="-120"/>
+              </a:rPr>
+              <a:t>The "Aryabhata predicted earth rotation" claim is mainstream and well-supported. Don't oversell — he didn't propose heliocentrism.</a:t>
+            </a:r>
+            <a:endParaRPr lang="en-US" sz="1200" dirty="0"/>
+          </a:p>
+          <a:p>
+            <a:pPr algn="l" marL="342900" indent="-342900">
+              <a:lnSpc>
+                <a:spcPts val="1620"/>
+              </a:lnSpc>
+              <a:spcAft>
+                <a:spcPts val="300"/>
+              </a:spcAft>
+              <a:buSzPct val="100000"/>
+              <a:buChar char="•"/>
+            </a:pPr>
+            <a:r>
+              <a:rPr lang="en-US" sz="1200" dirty="0">
+                <a:solidFill>
+                  <a:srgbClr val="1C2833"/>
+                </a:solidFill>
+                <a:latin typeface="Arial" pitchFamily="34" charset="0"/>
+                <a:ea typeface="Arial" pitchFamily="34" charset="-122"/>
+                <a:cs typeface="Arial" pitchFamily="34" charset="-120"/>
+              </a:rPr>
+              <a:t>The Yavana-influence question is rich: Indian astronomy genuinely engaged Greek astronomy via the Pañca-siddhāntikā. Both traditions exchanged ideas. Honest history.</a:t>
             </a:r>
             <a:endParaRPr lang="en-US" sz="1200" dirty="0"/>
           </a:p>
@@ -3315,7 +5819,7 @@
                 <a:ea typeface="Georgia" pitchFamily="34" charset="-122"/>
                 <a:cs typeface="Georgia" pitchFamily="34" charset="-120"/>
               </a:rPr>
-              <a:t>Materials</a:t>
+              <a:t>Learning objective</a:t>
             </a:r>
             <a:endParaRPr lang="en-US" sz="1800" dirty="0"/>
           </a:p>
@@ -3330,7 +5834,7 @@
         <p:spPr>
           <a:xfrm>
             <a:off x="406301" y="870942"/>
-            <a:ext cx="8498026" cy="213271"/>
+            <a:ext cx="8498026" cy="426541"/>
           </a:xfrm>
           <a:prstGeom prst="rect">
             <a:avLst/>
@@ -3363,7 +5867,299 @@
                 <a:ea typeface="Arial" pitchFamily="34" charset="-122"/>
                 <a:cs typeface="Arial" pitchFamily="34" charset="-120"/>
               </a:rPr>
-              <a:t>– Whiteboard – Printed extract: 1 verse from Aryabhaṭīya in translation – Globe (if available) for the rotation demo</a:t>
+              <a:t>Students name 3 specific Indian astronomical contributions with their authors/dates and articulate what each got right and what it got wrong.</a:t>
+            </a:r>
+            <a:endParaRPr lang="en-US" sz="1200" dirty="0"/>
+          </a:p>
+        </p:txBody>
+      </p:sp>
+      <p:sp>
+        <p:nvSpPr>
+          <p:cNvPr id="5" name="Text 3"/>
+          <p:cNvSpPr/>
+          <p:nvPr/>
+        </p:nvSpPr>
+        <p:spPr>
+          <a:xfrm>
+            <a:off x="406301" y="4434929"/>
+            <a:ext cx="8498026" cy="213271"/>
+          </a:xfrm>
+          <a:prstGeom prst="rect">
+            <a:avLst/>
+          </a:prstGeom>
+          <a:noFill/>
+          <a:ln/>
+        </p:spPr>
+        <p:txBody>
+          <a:bodyPr wrap="square" lIns="0" tIns="0" rIns="0" bIns="0" rtlCol="0" anchor="t"/>
+          <a:lstStyle/>
+          <a:p>
+            <a:pPr algn="l" indent="0" marL="0">
+              <a:lnSpc>
+                <a:spcPts val="1680"/>
+              </a:lnSpc>
+              <a:spcBef>
+                <a:spcPts val="300"/>
+              </a:spcBef>
+              <a:spcAft>
+                <a:spcPts val="300"/>
+              </a:spcAft>
+              <a:buNone/>
+            </a:pPr>
+            <a:r>
+              <a:rPr lang="en-US" sz="1200" dirty="0">
+                <a:solidFill>
+                  <a:srgbClr val="1C2833"/>
+                </a:solidFill>
+                <a:latin typeface="Arial" pitchFamily="34" charset="0"/>
+                <a:ea typeface="Arial" pitchFamily="34" charset="-122"/>
+                <a:cs typeface="Arial" pitchFamily="34" charset="-120"/>
+              </a:rPr>
+              <a:t>Middle ·  · IKS Curriculum</a:t>
+            </a:r>
+            <a:endParaRPr lang="en-US" sz="1200" dirty="0"/>
+          </a:p>
+        </p:txBody>
+      </p:sp>
+    </p:spTree>
+  </p:cSld>
+  <p:clrMapOvr>
+    <a:masterClrMapping/>
+  </p:clrMapOvr>
+</p:sld>
+</file>
+
+<file path=ppt/slides/slide20.xml><?xml version="1.0" encoding="utf-8"?>
+<p:sld xmlns:a="http://schemas.openxmlformats.org/drawingml/2006/main" xmlns:r="http://schemas.openxmlformats.org/officeDocument/2006/relationships" xmlns:p="http://schemas.openxmlformats.org/presentationml/2006/main">
+  <p:cSld name="Slide 20">
+    <p:bg>
+      <p:bgPr>
+        <a:solidFill>
+          <a:srgbClr val="FFFFFF"/>
+        </a:solidFill>
+      </p:bgPr>
+    </p:bg>
+    <p:spTree>
+      <p:nvGrpSpPr>
+        <p:cNvPr id="1" name=""/>
+        <p:cNvGrpSpPr/>
+        <p:nvPr/>
+      </p:nvGrpSpPr>
+      <p:grpSpPr>
+        <a:xfrm>
+          <a:off x="0" y="0"/>
+          <a:ext cx="0" cy="0"/>
+          <a:chOff x="0" y="0"/>
+          <a:chExt cx="0" cy="0"/>
+        </a:xfrm>
+      </p:grpSpPr>
+      <p:sp>
+        <p:nvSpPr>
+          <p:cNvPr id="2" name="Text 0"/>
+          <p:cNvSpPr/>
+          <p:nvPr/>
+        </p:nvSpPr>
+        <p:spPr>
+          <a:xfrm>
+            <a:off x="0" y="0"/>
+            <a:ext cx="9144000" cy="101501"/>
+          </a:xfrm>
+          <a:prstGeom prst="rect">
+            <a:avLst/>
+          </a:prstGeom>
+          <a:solidFill>
+            <a:srgbClr val="277884"/>
+          </a:solidFill>
+          <a:ln/>
+        </p:spPr>
+        <p:txBody>
+          <a:bodyPr wrap="square" rtlCol="0" anchor="ctr"/>
+          <a:lstStyle/>
+          <a:p>
+            <a:pPr indent="0" marL="0">
+              <a:buNone/>
+            </a:pPr>
+            <a:endParaRPr lang="en-US" dirty="0"/>
+          </a:p>
+        </p:txBody>
+      </p:sp>
+      <p:sp>
+        <p:nvSpPr>
+          <p:cNvPr id="3" name="Text 1"/>
+          <p:cNvSpPr/>
+          <p:nvPr/>
+        </p:nvSpPr>
+        <p:spPr>
+          <a:xfrm>
+            <a:off x="406301" y="457051"/>
+            <a:ext cx="8498026" cy="274290"/>
+          </a:xfrm>
+          <a:prstGeom prst="rect">
+            <a:avLst/>
+          </a:prstGeom>
+          <a:noFill/>
+          <a:ln/>
+        </p:spPr>
+        <p:txBody>
+          <a:bodyPr wrap="square" lIns="0" tIns="0" rIns="0" bIns="0" rtlCol="0" anchor="t"/>
+          <a:lstStyle/>
+          <a:p>
+            <a:pPr algn="l" indent="0" marL="0">
+              <a:lnSpc>
+                <a:spcPts val="2160"/>
+              </a:lnSpc>
+              <a:spcBef>
+                <a:spcPts val="600"/>
+              </a:spcBef>
+              <a:spcAft>
+                <a:spcPts val="800"/>
+              </a:spcAft>
+              <a:buNone/>
+            </a:pPr>
+            <a:r>
+              <a:rPr lang="en-US" sz="1800" b="1" dirty="0">
+                <a:solidFill>
+                  <a:srgbClr val="FE4447"/>
+                </a:solidFill>
+                <a:latin typeface="Georgia" pitchFamily="34" charset="0"/>
+                <a:ea typeface="Georgia" pitchFamily="34" charset="-122"/>
+                <a:cs typeface="Georgia" pitchFamily="34" charset="-120"/>
+              </a:rPr>
+              <a:t>Citation(s) used</a:t>
+            </a:r>
+            <a:endParaRPr lang="en-US" sz="1800" dirty="0"/>
+          </a:p>
+        </p:txBody>
+      </p:sp>
+      <p:sp>
+        <p:nvSpPr>
+          <p:cNvPr id="4" name="Text 2"/>
+          <p:cNvSpPr/>
+          <p:nvPr/>
+        </p:nvSpPr>
+        <p:spPr>
+          <a:xfrm>
+            <a:off x="634901" y="883593"/>
+            <a:ext cx="8102798" cy="769441"/>
+          </a:xfrm>
+          <a:prstGeom prst="rect">
+            <a:avLst/>
+          </a:prstGeom>
+          <a:noFill/>
+          <a:ln/>
+        </p:spPr>
+        <p:txBody>
+          <a:bodyPr wrap="square" lIns="0" tIns="0" rIns="0" bIns="0" rtlCol="0" anchor="t"/>
+          <a:lstStyle/>
+          <a:p>
+            <a:pPr algn="l" marL="342900" indent="-342900">
+              <a:lnSpc>
+                <a:spcPts val="1620"/>
+              </a:lnSpc>
+              <a:spcAft>
+                <a:spcPts val="300"/>
+              </a:spcAft>
+              <a:buSzPct val="100000"/>
+              <a:buChar char="•"/>
+            </a:pPr>
+            <a:r>
+              <a:rPr lang="en-US" sz="1200" dirty="0">
+                <a:solidFill>
+                  <a:srgbClr val="1C2833"/>
+                </a:solidFill>
+                <a:latin typeface="Arial" pitchFamily="34" charset="0"/>
+                <a:ea typeface="Arial" pitchFamily="34" charset="-122"/>
+                <a:cs typeface="Arial" pitchFamily="34" charset="-120"/>
+              </a:rPr>
+              <a:t>Aryabhaṭīya (499 CE) — Clark (1930) translation.</a:t>
+            </a:r>
+            <a:endParaRPr lang="en-US" sz="1200" dirty="0"/>
+          </a:p>
+          <a:p>
+            <a:pPr algn="l" marL="342900" indent="-342900">
+              <a:lnSpc>
+                <a:spcPts val="1620"/>
+              </a:lnSpc>
+              <a:spcAft>
+                <a:spcPts val="300"/>
+              </a:spcAft>
+              <a:buSzPct val="100000"/>
+              <a:buChar char="•"/>
+            </a:pPr>
+            <a:r>
+              <a:rPr lang="en-US" sz="1200" dirty="0">
+                <a:solidFill>
+                  <a:srgbClr val="1C2833"/>
+                </a:solidFill>
+                <a:latin typeface="Arial" pitchFamily="34" charset="0"/>
+                <a:ea typeface="Arial" pitchFamily="34" charset="-122"/>
+                <a:cs typeface="Arial" pitchFamily="34" charset="-120"/>
+              </a:rPr>
+              <a:t>Plofker (2009), Chapter 4.</a:t>
+            </a:r>
+            <a:endParaRPr lang="en-US" sz="1200" dirty="0"/>
+          </a:p>
+          <a:p>
+            <a:pPr algn="l" marL="342900" indent="-342900">
+              <a:lnSpc>
+                <a:spcPts val="1620"/>
+              </a:lnSpc>
+              <a:spcAft>
+                <a:spcPts val="300"/>
+              </a:spcAft>
+              <a:buSzPct val="100000"/>
+              <a:buChar char="•"/>
+            </a:pPr>
+            <a:r>
+              <a:rPr lang="en-US" sz="1200" dirty="0">
+                <a:solidFill>
+                  <a:srgbClr val="1C2833"/>
+                </a:solidFill>
+                <a:latin typeface="Arial" pitchFamily="34" charset="0"/>
+                <a:ea typeface="Arial" pitchFamily="34" charset="-122"/>
+                <a:cs typeface="Arial" pitchFamily="34" charset="-120"/>
+              </a:rPr>
+              <a:t>Pingree, D. (1996). "Astronomy in India" in </a:t>
+            </a:r>
+            <a:pPr algn="l" indent="0" marL="0">
+              <a:lnSpc>
+                <a:spcPts val="1620"/>
+              </a:lnSpc>
+              <a:spcAft>
+                <a:spcPts val="300"/>
+              </a:spcAft>
+              <a:buNone/>
+            </a:pPr>
+            <a:r>
+              <a:rPr lang="en-US" sz="1200" i="1" dirty="0">
+                <a:solidFill>
+                  <a:srgbClr val="1C2833"/>
+                </a:solidFill>
+                <a:latin typeface="Arial" pitchFamily="34" charset="0"/>
+                <a:ea typeface="Arial" pitchFamily="34" charset="-122"/>
+                <a:cs typeface="Arial" pitchFamily="34" charset="-120"/>
+              </a:rPr>
+              <a:t>Astronomy Before the Telescope</a:t>
+            </a:r>
+            <a:pPr algn="l" indent="0" marL="0">
+              <a:lnSpc>
+                <a:spcPts val="1620"/>
+              </a:lnSpc>
+              <a:spcAft>
+                <a:spcPts val="300"/>
+              </a:spcAft>
+              <a:buNone/>
+            </a:pPr>
+            <a:r>
+              <a:rPr lang="en-US" sz="1200" dirty="0">
+                <a:solidFill>
+                  <a:srgbClr val="1C2833"/>
+                </a:solidFill>
+                <a:latin typeface="Arial" pitchFamily="34" charset="0"/>
+                <a:ea typeface="Arial" pitchFamily="34" charset="-122"/>
+                <a:cs typeface="Arial" pitchFamily="34" charset="-120"/>
+              </a:rPr>
+              <a:t>.</a:t>
             </a:r>
             <a:endParaRPr lang="en-US" sz="1200" dirty="0"/>
           </a:p>
@@ -3521,7 +6317,7 @@
                 <a:ea typeface="Georgia" pitchFamily="34" charset="-122"/>
                 <a:cs typeface="Georgia" pitchFamily="34" charset="-120"/>
               </a:rPr>
-              <a:t>Vocabulary</a:t>
+              <a:t>Materials</a:t>
             </a:r>
             <a:endParaRPr lang="en-US" sz="1800" dirty="0"/>
           </a:p>
@@ -3559,7 +6355,7 @@
               <a:buChar char="•"/>
             </a:pPr>
             <a:r>
-              <a:rPr lang="en-US" sz="1200" i="1" dirty="0">
+              <a:rPr lang="en-US" sz="1200" dirty="0">
                 <a:solidFill>
                   <a:srgbClr val="1C2833"/>
                 </a:solidFill>
@@ -3567,16 +6363,20 @@
                 <a:ea typeface="Arial" pitchFamily="34" charset="-122"/>
                 <a:cs typeface="Arial" pitchFamily="34" charset="-120"/>
               </a:rPr>
-              <a:t>jyotiṣa</a:t>
-            </a:r>
-            <a:pPr algn="l" indent="0" marL="0">
+              <a:t>Whiteboard</a:t>
+            </a:r>
+            <a:endParaRPr lang="en-US" sz="1200" dirty="0"/>
+          </a:p>
+          <a:p>
+            <a:pPr algn="l" marL="342900" indent="-342900">
               <a:lnSpc>
                 <a:spcPts val="1620"/>
               </a:lnSpc>
               <a:spcAft>
                 <a:spcPts val="300"/>
               </a:spcAft>
-              <a:buNone/>
+              <a:buSzPct val="100000"/>
+              <a:buChar char="•"/>
             </a:pPr>
             <a:r>
               <a:rPr lang="en-US" sz="1200" dirty="0">
@@ -3587,7 +6387,7 @@
                 <a:ea typeface="Arial" pitchFamily="34" charset="-122"/>
                 <a:cs typeface="Arial" pitchFamily="34" charset="-120"/>
               </a:rPr>
-              <a:t> — astronomy/astrology (Vedanga #6)</a:t>
+              <a:t>Printed extract: 1 verse from Aryabhaṭīya in translation</a:t>
             </a:r>
             <a:endParaRPr lang="en-US" sz="1200" dirty="0"/>
           </a:p>
@@ -3603,7 +6403,7 @@
               <a:buChar char="•"/>
             </a:pPr>
             <a:r>
-              <a:rPr lang="en-US" sz="1200" i="1" dirty="0">
+              <a:rPr lang="en-US" sz="1200" dirty="0">
                 <a:solidFill>
                   <a:srgbClr val="1C2833"/>
                 </a:solidFill>
@@ -3611,71 +6411,7 @@
                 <a:ea typeface="Arial" pitchFamily="34" charset="-122"/>
                 <a:cs typeface="Arial" pitchFamily="34" charset="-120"/>
               </a:rPr>
-              <a:t>siddhānta</a:t>
-            </a:r>
-            <a:pPr algn="l" indent="0" marL="0">
-              <a:lnSpc>
-                <a:spcPts val="1620"/>
-              </a:lnSpc>
-              <a:spcAft>
-                <a:spcPts val="300"/>
-              </a:spcAft>
-              <a:buNone/>
-            </a:pPr>
-            <a:r>
-              <a:rPr lang="en-US" sz="1200" dirty="0">
-                <a:solidFill>
-                  <a:srgbClr val="1C2833"/>
-                </a:solidFill>
-                <a:latin typeface="Arial" pitchFamily="34" charset="0"/>
-                <a:ea typeface="Arial" pitchFamily="34" charset="-122"/>
-                <a:cs typeface="Arial" pitchFamily="34" charset="-120"/>
-              </a:rPr>
-              <a:t> — "established treatise; systematic astronomical text"</a:t>
-            </a:r>
-            <a:endParaRPr lang="en-US" sz="1200" dirty="0"/>
-          </a:p>
-          <a:p>
-            <a:pPr algn="l" marL="342900" indent="-342900">
-              <a:lnSpc>
-                <a:spcPts val="1620"/>
-              </a:lnSpc>
-              <a:spcAft>
-                <a:spcPts val="300"/>
-              </a:spcAft>
-              <a:buSzPct val="100000"/>
-              <a:buChar char="•"/>
-            </a:pPr>
-            <a:r>
-              <a:rPr lang="en-US" sz="1200" i="1" dirty="0">
-                <a:solidFill>
-                  <a:srgbClr val="1C2833"/>
-                </a:solidFill>
-                <a:latin typeface="Arial" pitchFamily="34" charset="0"/>
-                <a:ea typeface="Arial" pitchFamily="34" charset="-122"/>
-                <a:cs typeface="Arial" pitchFamily="34" charset="-120"/>
-              </a:rPr>
-              <a:t>nakṣatra</a:t>
-            </a:r>
-            <a:pPr algn="l" indent="0" marL="0">
-              <a:lnSpc>
-                <a:spcPts val="1620"/>
-              </a:lnSpc>
-              <a:spcAft>
-                <a:spcPts val="300"/>
-              </a:spcAft>
-              <a:buNone/>
-            </a:pPr>
-            <a:r>
-              <a:rPr lang="en-US" sz="1200" dirty="0">
-                <a:solidFill>
-                  <a:srgbClr val="1C2833"/>
-                </a:solidFill>
-                <a:latin typeface="Arial" pitchFamily="34" charset="0"/>
-                <a:ea typeface="Arial" pitchFamily="34" charset="-122"/>
-                <a:cs typeface="Arial" pitchFamily="34" charset="-120"/>
-              </a:rPr>
-              <a:t> — "lunar mansion; star group"</a:t>
+              <a:t>Globe (if available) for the rotation demo</a:t>
             </a:r>
             <a:endParaRPr lang="en-US" sz="1200" dirty="0"/>
           </a:p>
@@ -3833,7 +6569,7 @@
                 <a:ea typeface="Georgia" pitchFamily="34" charset="-122"/>
                 <a:cs typeface="Georgia" pitchFamily="34" charset="-120"/>
               </a:rPr>
-              <a:t>Flow</a:t>
+              <a:t>Vocabulary</a:t>
             </a:r>
             <a:endParaRPr lang="en-US" sz="1800" dirty="0"/>
           </a:p>
@@ -3842,6 +6578,160 @@
       <p:sp>
         <p:nvSpPr>
           <p:cNvPr id="4" name="Text 2"/>
+          <p:cNvSpPr/>
+          <p:nvPr/>
+        </p:nvSpPr>
+        <p:spPr>
+          <a:xfrm>
+            <a:off x="634901" y="883593"/>
+            <a:ext cx="8102798" cy="769441"/>
+          </a:xfrm>
+          <a:prstGeom prst="rect">
+            <a:avLst/>
+          </a:prstGeom>
+          <a:noFill/>
+          <a:ln/>
+        </p:spPr>
+        <p:txBody>
+          <a:bodyPr wrap="square" lIns="0" tIns="0" rIns="0" bIns="0" rtlCol="0" anchor="t"/>
+          <a:lstStyle/>
+          <a:p>
+            <a:pPr algn="l" marL="342900" indent="-342900">
+              <a:lnSpc>
+                <a:spcPts val="1620"/>
+              </a:lnSpc>
+              <a:spcAft>
+                <a:spcPts val="300"/>
+              </a:spcAft>
+              <a:buSzPct val="100000"/>
+              <a:buChar char="•"/>
+            </a:pPr>
+            <a:r>
+              <a:rPr lang="en-US" sz="1200" i="1" dirty="0">
+                <a:solidFill>
+                  <a:srgbClr val="1C2833"/>
+                </a:solidFill>
+                <a:latin typeface="Arial" pitchFamily="34" charset="0"/>
+                <a:ea typeface="Arial" pitchFamily="34" charset="-122"/>
+                <a:cs typeface="Arial" pitchFamily="34" charset="-120"/>
+              </a:rPr>
+              <a:t>jyotiṣa</a:t>
+            </a:r>
+            <a:pPr algn="l" indent="0" marL="0">
+              <a:lnSpc>
+                <a:spcPts val="1620"/>
+              </a:lnSpc>
+              <a:spcAft>
+                <a:spcPts val="300"/>
+              </a:spcAft>
+              <a:buNone/>
+            </a:pPr>
+            <a:r>
+              <a:rPr lang="en-US" sz="1200" dirty="0">
+                <a:solidFill>
+                  <a:srgbClr val="1C2833"/>
+                </a:solidFill>
+                <a:latin typeface="Arial" pitchFamily="34" charset="0"/>
+                <a:ea typeface="Arial" pitchFamily="34" charset="-122"/>
+                <a:cs typeface="Arial" pitchFamily="34" charset="-120"/>
+              </a:rPr>
+              <a:t> — astronomy/astrology (Vedanga #6)</a:t>
+            </a:r>
+            <a:endParaRPr lang="en-US" sz="1200" dirty="0"/>
+          </a:p>
+          <a:p>
+            <a:pPr algn="l" marL="342900" indent="-342900">
+              <a:lnSpc>
+                <a:spcPts val="1620"/>
+              </a:lnSpc>
+              <a:spcAft>
+                <a:spcPts val="300"/>
+              </a:spcAft>
+              <a:buSzPct val="100000"/>
+              <a:buChar char="•"/>
+            </a:pPr>
+            <a:r>
+              <a:rPr lang="en-US" sz="1200" i="1" dirty="0">
+                <a:solidFill>
+                  <a:srgbClr val="1C2833"/>
+                </a:solidFill>
+                <a:latin typeface="Arial" pitchFamily="34" charset="0"/>
+                <a:ea typeface="Arial" pitchFamily="34" charset="-122"/>
+                <a:cs typeface="Arial" pitchFamily="34" charset="-120"/>
+              </a:rPr>
+              <a:t>siddhānta</a:t>
+            </a:r>
+            <a:pPr algn="l" indent="0" marL="0">
+              <a:lnSpc>
+                <a:spcPts val="1620"/>
+              </a:lnSpc>
+              <a:spcAft>
+                <a:spcPts val="300"/>
+              </a:spcAft>
+              <a:buNone/>
+            </a:pPr>
+            <a:r>
+              <a:rPr lang="en-US" sz="1200" dirty="0">
+                <a:solidFill>
+                  <a:srgbClr val="1C2833"/>
+                </a:solidFill>
+                <a:latin typeface="Arial" pitchFamily="34" charset="0"/>
+                <a:ea typeface="Arial" pitchFamily="34" charset="-122"/>
+                <a:cs typeface="Arial" pitchFamily="34" charset="-120"/>
+              </a:rPr>
+              <a:t> — "established treatise; systematic astronomical text"</a:t>
+            </a:r>
+            <a:endParaRPr lang="en-US" sz="1200" dirty="0"/>
+          </a:p>
+          <a:p>
+            <a:pPr algn="l" marL="342900" indent="-342900">
+              <a:lnSpc>
+                <a:spcPts val="1620"/>
+              </a:lnSpc>
+              <a:spcAft>
+                <a:spcPts val="300"/>
+              </a:spcAft>
+              <a:buSzPct val="100000"/>
+              <a:buChar char="•"/>
+            </a:pPr>
+            <a:r>
+              <a:rPr lang="en-US" sz="1200" i="1" dirty="0">
+                <a:solidFill>
+                  <a:srgbClr val="1C2833"/>
+                </a:solidFill>
+                <a:latin typeface="Arial" pitchFamily="34" charset="0"/>
+                <a:ea typeface="Arial" pitchFamily="34" charset="-122"/>
+                <a:cs typeface="Arial" pitchFamily="34" charset="-120"/>
+              </a:rPr>
+              <a:t>nakṣatra</a:t>
+            </a:r>
+            <a:pPr algn="l" indent="0" marL="0">
+              <a:lnSpc>
+                <a:spcPts val="1620"/>
+              </a:lnSpc>
+              <a:spcAft>
+                <a:spcPts val="300"/>
+              </a:spcAft>
+              <a:buNone/>
+            </a:pPr>
+            <a:r>
+              <a:rPr lang="en-US" sz="1200" dirty="0">
+                <a:solidFill>
+                  <a:srgbClr val="1C2833"/>
+                </a:solidFill>
+                <a:latin typeface="Arial" pitchFamily="34" charset="0"/>
+                <a:ea typeface="Arial" pitchFamily="34" charset="-122"/>
+                <a:cs typeface="Arial" pitchFamily="34" charset="-120"/>
+              </a:rPr>
+              <a:t> — "lunar mansion; star group"</a:t>
+            </a:r>
+            <a:endParaRPr lang="en-US" sz="1200" dirty="0"/>
+          </a:p>
+        </p:txBody>
+      </p:sp>
+      <p:sp>
+        <p:nvSpPr>
+          <p:cNvPr id="5" name="Text 3"/>
           <p:cNvSpPr/>
           <p:nvPr/>
         </p:nvSpPr>
@@ -3991,7 +6881,7 @@
                 <a:ea typeface="Georgia" pitchFamily="34" charset="-122"/>
                 <a:cs typeface="Georgia" pitchFamily="34" charset="-120"/>
               </a:rPr>
-              <a:t>Warm-up (5 min)</a:t>
+              <a:t>Flow</a:t>
             </a:r>
             <a:endParaRPr lang="en-US" sz="1800" dirty="0"/>
           </a:p>
@@ -4000,54 +6890,6 @@
       <p:sp>
         <p:nvSpPr>
           <p:cNvPr id="4" name="Text 2"/>
-          <p:cNvSpPr/>
-          <p:nvPr/>
-        </p:nvSpPr>
-        <p:spPr>
-          <a:xfrm>
-            <a:off x="406301" y="870942"/>
-            <a:ext cx="8498026" cy="213271"/>
-          </a:xfrm>
-          <a:prstGeom prst="rect">
-            <a:avLst/>
-          </a:prstGeom>
-          <a:noFill/>
-          <a:ln/>
-        </p:spPr>
-        <p:txBody>
-          <a:bodyPr wrap="square" lIns="0" tIns="0" rIns="0" bIns="0" rtlCol="0" anchor="t"/>
-          <a:lstStyle/>
-          <a:p>
-            <a:pPr algn="l" indent="0" marL="0">
-              <a:lnSpc>
-                <a:spcPts val="1680"/>
-              </a:lnSpc>
-              <a:spcBef>
-                <a:spcPts val="300"/>
-              </a:spcBef>
-              <a:spcAft>
-                <a:spcPts val="300"/>
-              </a:spcAft>
-              <a:buNone/>
-            </a:pPr>
-            <a:r>
-              <a:rPr lang="en-US" sz="1200" dirty="0">
-                <a:solidFill>
-                  <a:srgbClr val="1C2833"/>
-                </a:solidFill>
-                <a:latin typeface="Arial" pitchFamily="34" charset="0"/>
-                <a:ea typeface="Arial" pitchFamily="34" charset="-122"/>
-                <a:cs typeface="Arial" pitchFamily="34" charset="-120"/>
-              </a:rPr>
-              <a:t>Daily prompt + recall: 2 students name one Vedanga.</a:t>
-            </a:r>
-            <a:endParaRPr lang="en-US" sz="1200" dirty="0"/>
-          </a:p>
-        </p:txBody>
-      </p:sp>
-      <p:sp>
-        <p:nvSpPr>
-          <p:cNvPr id="5" name="Text 3"/>
           <p:cNvSpPr/>
           <p:nvPr/>
         </p:nvSpPr>
@@ -4197,7 +7039,7 @@
                 <a:ea typeface="Georgia" pitchFamily="34" charset="-122"/>
                 <a:cs typeface="Georgia" pitchFamily="34" charset="-120"/>
               </a:rPr>
-              <a:t>Core (25 min)</a:t>
+              <a:t>Warm-up (5 min)</a:t>
             </a:r>
             <a:endParaRPr lang="en-US" sz="1800" dirty="0"/>
           </a:p>
@@ -4211,8 +7053,8 @@
         </p:nvSpPr>
         <p:spPr>
           <a:xfrm>
-            <a:off x="634901" y="883593"/>
-            <a:ext cx="8102798" cy="281880"/>
+            <a:off x="406301" y="870942"/>
+            <a:ext cx="8498026" cy="213271"/>
           </a:xfrm>
           <a:prstGeom prst="rect">
             <a:avLst/>
@@ -4224,18 +7066,20 @@
           <a:bodyPr wrap="square" lIns="0" tIns="0" rIns="0" bIns="0" rtlCol="0" anchor="t"/>
           <a:lstStyle/>
           <a:p>
-            <a:pPr algn="l" marL="342900" indent="-342900">
-              <a:lnSpc>
-                <a:spcPts val="1620"/>
-              </a:lnSpc>
-              <a:spcAft>
-                <a:spcPts val="300"/>
-              </a:spcAft>
-              <a:buSzPct val="100000"/>
-              <a:buChar char="•"/>
-            </a:pPr>
-            <a:r>
-              <a:rPr lang="en-US" sz="1200" b="1" dirty="0">
+            <a:pPr algn="l" indent="0" marL="0">
+              <a:lnSpc>
+                <a:spcPts val="1680"/>
+              </a:lnSpc>
+              <a:spcBef>
+                <a:spcPts val="300"/>
+              </a:spcBef>
+              <a:spcAft>
+                <a:spcPts val="300"/>
+              </a:spcAft>
+              <a:buNone/>
+            </a:pPr>
+            <a:r>
+              <a:rPr lang="en-US" sz="1200" dirty="0">
                 <a:solidFill>
                   <a:srgbClr val="1C2833"/>
                 </a:solidFill>
@@ -4243,7 +7087,7 @@
                 <a:ea typeface="Arial" pitchFamily="34" charset="-122"/>
                 <a:cs typeface="Arial" pitchFamily="34" charset="-120"/>
               </a:rPr>
-              <a:t>Three specific contributions:</a:t>
+              <a:t>Daily prompt + recall: 2 students name one Vedanga.</a:t>
             </a:r>
             <a:endParaRPr lang="en-US" sz="1200" dirty="0"/>
           </a:p>
@@ -4257,658 +7101,7 @@
         </p:nvSpPr>
         <p:spPr>
           <a:xfrm>
-            <a:off x="406301" y="1254323"/>
-            <a:ext cx="8498026" cy="639812"/>
-          </a:xfrm>
-          <a:prstGeom prst="rect">
-            <a:avLst/>
-          </a:prstGeom>
-          <a:noFill/>
-          <a:ln/>
-        </p:spPr>
-        <p:txBody>
-          <a:bodyPr wrap="square" lIns="0" tIns="0" rIns="0" bIns="0" rtlCol="0" anchor="t"/>
-          <a:lstStyle/>
-          <a:p>
-            <a:pPr algn="l" indent="0" marL="0">
-              <a:lnSpc>
-                <a:spcPts val="1680"/>
-              </a:lnSpc>
-              <a:spcBef>
-                <a:spcPts val="300"/>
-              </a:spcBef>
-              <a:spcAft>
-                <a:spcPts val="300"/>
-              </a:spcAft>
-              <a:buNone/>
-            </a:pPr>
-            <a:r>
-              <a:rPr lang="en-US" sz="1200" b="1" dirty="0">
-                <a:solidFill>
-                  <a:srgbClr val="1C2833"/>
-                </a:solidFill>
-                <a:latin typeface="Arial" pitchFamily="34" charset="0"/>
-                <a:ea typeface="Arial" pitchFamily="34" charset="-122"/>
-                <a:cs typeface="Arial" pitchFamily="34" charset="-120"/>
-              </a:rPr>
-              <a:t>(a) Aryabhata (c. 476–550 CE)</a:t>
-            </a:r>
-            <a:pPr algn="l" indent="0" marL="0">
-              <a:lnSpc>
-                <a:spcPts val="1680"/>
-              </a:lnSpc>
-              <a:spcBef>
-                <a:spcPts val="300"/>
-              </a:spcBef>
-              <a:spcAft>
-                <a:spcPts val="300"/>
-              </a:spcAft>
-              <a:buNone/>
-            </a:pPr>
-            <a:r>
-              <a:rPr lang="en-US" sz="1200" dirty="0">
-                <a:solidFill>
-                  <a:srgbClr val="1C2833"/>
-                </a:solidFill>
-                <a:latin typeface="Arial" pitchFamily="34" charset="0"/>
-                <a:ea typeface="Arial" pitchFamily="34" charset="-122"/>
-                <a:cs typeface="Arial" pitchFamily="34" charset="-120"/>
-              </a:rPr>
-              <a:t> — wrote </a:t>
-            </a:r>
-            <a:pPr algn="l" indent="0" marL="0">
-              <a:lnSpc>
-                <a:spcPts val="1680"/>
-              </a:lnSpc>
-              <a:spcBef>
-                <a:spcPts val="300"/>
-              </a:spcBef>
-              <a:spcAft>
-                <a:spcPts val="300"/>
-              </a:spcAft>
-              <a:buNone/>
-            </a:pPr>
-            <a:r>
-              <a:rPr lang="en-US" sz="1200" i="1" dirty="0">
-                <a:solidFill>
-                  <a:srgbClr val="1C2833"/>
-                </a:solidFill>
-                <a:latin typeface="Arial" pitchFamily="34" charset="0"/>
-                <a:ea typeface="Arial" pitchFamily="34" charset="-122"/>
-                <a:cs typeface="Arial" pitchFamily="34" charset="-120"/>
-              </a:rPr>
-              <a:t>Aryabhaṭīya</a:t>
-            </a:r>
-            <a:pPr algn="l" indent="0" marL="0">
-              <a:lnSpc>
-                <a:spcPts val="1680"/>
-              </a:lnSpc>
-              <a:spcBef>
-                <a:spcPts val="300"/>
-              </a:spcBef>
-              <a:spcAft>
-                <a:spcPts val="300"/>
-              </a:spcAft>
-              <a:buNone/>
-            </a:pPr>
-            <a:r>
-              <a:rPr lang="en-US" sz="1200" dirty="0">
-                <a:solidFill>
-                  <a:srgbClr val="1C2833"/>
-                </a:solidFill>
-                <a:latin typeface="Arial" pitchFamily="34" charset="0"/>
-                <a:ea typeface="Arial" pitchFamily="34" charset="-122"/>
-                <a:cs typeface="Arial" pitchFamily="34" charset="-120"/>
-              </a:rPr>
-              <a:t> at age 23. – Proposed the </a:t>
-            </a:r>
-            <a:pPr algn="l" indent="0" marL="0">
-              <a:lnSpc>
-                <a:spcPts val="1680"/>
-              </a:lnSpc>
-              <a:spcBef>
-                <a:spcPts val="300"/>
-              </a:spcBef>
-              <a:spcAft>
-                <a:spcPts val="300"/>
-              </a:spcAft>
-              <a:buNone/>
-            </a:pPr>
-            <a:r>
-              <a:rPr lang="en-US" sz="1200" b="1" dirty="0">
-                <a:solidFill>
-                  <a:srgbClr val="1C2833"/>
-                </a:solidFill>
-                <a:latin typeface="Arial" pitchFamily="34" charset="0"/>
-                <a:ea typeface="Arial" pitchFamily="34" charset="-122"/>
-                <a:cs typeface="Arial" pitchFamily="34" charset="-120"/>
-              </a:rPr>
-              <a:t>earth rotates on its axis</a:t>
-            </a:r>
-            <a:pPr algn="l" indent="0" marL="0">
-              <a:lnSpc>
-                <a:spcPts val="1680"/>
-              </a:lnSpc>
-              <a:spcBef>
-                <a:spcPts val="300"/>
-              </a:spcBef>
-              <a:spcAft>
-                <a:spcPts val="300"/>
-              </a:spcAft>
-              <a:buNone/>
-            </a:pPr>
-            <a:r>
-              <a:rPr lang="en-US" sz="1200" dirty="0">
-                <a:solidFill>
-                  <a:srgbClr val="1C2833"/>
-                </a:solidFill>
-                <a:latin typeface="Arial" pitchFamily="34" charset="0"/>
-                <a:ea typeface="Arial" pitchFamily="34" charset="-122"/>
-                <a:cs typeface="Arial" pitchFamily="34" charset="-120"/>
-              </a:rPr>
-              <a:t> (this is correct). Most contemporaries believed the sky rotated. – Approximated </a:t>
-            </a:r>
-            <a:pPr algn="l" indent="0" marL="0">
-              <a:lnSpc>
-                <a:spcPts val="1680"/>
-              </a:lnSpc>
-              <a:spcBef>
-                <a:spcPts val="300"/>
-              </a:spcBef>
-              <a:spcAft>
-                <a:spcPts val="300"/>
-              </a:spcAft>
-              <a:buNone/>
-            </a:pPr>
-            <a:r>
-              <a:rPr lang="en-US" sz="1200" b="1" dirty="0">
-                <a:solidFill>
-                  <a:srgbClr val="1C2833"/>
-                </a:solidFill>
-                <a:latin typeface="Arial" pitchFamily="34" charset="0"/>
-                <a:ea typeface="Arial" pitchFamily="34" charset="-122"/>
-                <a:cs typeface="Arial" pitchFamily="34" charset="-120"/>
-              </a:rPr>
-              <a:t>π to four decimal places</a:t>
-            </a:r>
-            <a:pPr algn="l" indent="0" marL="0">
-              <a:lnSpc>
-                <a:spcPts val="1680"/>
-              </a:lnSpc>
-              <a:spcBef>
-                <a:spcPts val="300"/>
-              </a:spcBef>
-              <a:spcAft>
-                <a:spcPts val="300"/>
-              </a:spcAft>
-              <a:buNone/>
-            </a:pPr>
-            <a:r>
-              <a:rPr lang="en-US" sz="1200" dirty="0">
-                <a:solidFill>
-                  <a:srgbClr val="1C2833"/>
-                </a:solidFill>
-                <a:latin typeface="Arial" pitchFamily="34" charset="0"/>
-                <a:ea typeface="Arial" pitchFamily="34" charset="-122"/>
-                <a:cs typeface="Arial" pitchFamily="34" charset="-120"/>
-              </a:rPr>
-              <a:t> (3.1416). – Computed planetary periods and eclipse predictions. – Did NOT propose heliocentrism (the sun-centred model is Copernicus, 1500s).</a:t>
-            </a:r>
-            <a:endParaRPr lang="en-US" sz="1200" dirty="0"/>
-          </a:p>
-        </p:txBody>
-      </p:sp>
-      <p:sp>
-        <p:nvSpPr>
-          <p:cNvPr id="6" name="Text 4"/>
-          <p:cNvSpPr/>
-          <p:nvPr/>
-        </p:nvSpPr>
-        <p:spPr>
-          <a:xfrm>
-            <a:off x="406301" y="1970336"/>
-            <a:ext cx="8498026" cy="426541"/>
-          </a:xfrm>
-          <a:prstGeom prst="rect">
-            <a:avLst/>
-          </a:prstGeom>
-          <a:noFill/>
-          <a:ln/>
-        </p:spPr>
-        <p:txBody>
-          <a:bodyPr wrap="square" lIns="0" tIns="0" rIns="0" bIns="0" rtlCol="0" anchor="t"/>
-          <a:lstStyle/>
-          <a:p>
-            <a:pPr algn="l" indent="0" marL="0">
-              <a:lnSpc>
-                <a:spcPts val="1680"/>
-              </a:lnSpc>
-              <a:spcBef>
-                <a:spcPts val="300"/>
-              </a:spcBef>
-              <a:spcAft>
-                <a:spcPts val="300"/>
-              </a:spcAft>
-              <a:buNone/>
-            </a:pPr>
-            <a:r>
-              <a:rPr lang="en-US" sz="1200" b="1" dirty="0">
-                <a:solidFill>
-                  <a:srgbClr val="1C2833"/>
-                </a:solidFill>
-                <a:latin typeface="Arial" pitchFamily="34" charset="0"/>
-                <a:ea typeface="Arial" pitchFamily="34" charset="-122"/>
-                <a:cs typeface="Arial" pitchFamily="34" charset="-120"/>
-              </a:rPr>
-              <a:t>(b) Sūrya-siddhānta (early CE)</a:t>
-            </a:r>
-            <a:pPr algn="l" indent="0" marL="0">
-              <a:lnSpc>
-                <a:spcPts val="1680"/>
-              </a:lnSpc>
-              <a:spcBef>
-                <a:spcPts val="300"/>
-              </a:spcBef>
-              <a:spcAft>
-                <a:spcPts val="300"/>
-              </a:spcAft>
-              <a:buNone/>
-            </a:pPr>
-            <a:r>
-              <a:rPr lang="en-US" sz="1200" dirty="0">
-                <a:solidFill>
-                  <a:srgbClr val="1C2833"/>
-                </a:solidFill>
-                <a:latin typeface="Arial" pitchFamily="34" charset="0"/>
-                <a:ea typeface="Arial" pitchFamily="34" charset="-122"/>
-                <a:cs typeface="Arial" pitchFamily="34" charset="-120"/>
-              </a:rPr>
-              <a:t> — comprehensive astronomical text. – Detailed planetary calculations. – Earth's circumference computed with ~1% accuracy. – Eclipse predictions accurate enough to publish almanacs.</a:t>
-            </a:r>
-            <a:endParaRPr lang="en-US" sz="1200" dirty="0"/>
-          </a:p>
-        </p:txBody>
-      </p:sp>
-      <p:sp>
-        <p:nvSpPr>
-          <p:cNvPr id="7" name="Text 5"/>
-          <p:cNvSpPr/>
-          <p:nvPr/>
-        </p:nvSpPr>
-        <p:spPr>
-          <a:xfrm>
-            <a:off x="406301" y="2473077"/>
-            <a:ext cx="8498026" cy="426541"/>
-          </a:xfrm>
-          <a:prstGeom prst="rect">
-            <a:avLst/>
-          </a:prstGeom>
-          <a:noFill/>
-          <a:ln/>
-        </p:spPr>
-        <p:txBody>
-          <a:bodyPr wrap="square" lIns="0" tIns="0" rIns="0" bIns="0" rtlCol="0" anchor="t"/>
-          <a:lstStyle/>
-          <a:p>
-            <a:pPr algn="l" indent="0" marL="0">
-              <a:lnSpc>
-                <a:spcPts val="1680"/>
-              </a:lnSpc>
-              <a:spcBef>
-                <a:spcPts val="300"/>
-              </a:spcBef>
-              <a:spcAft>
-                <a:spcPts val="300"/>
-              </a:spcAft>
-              <a:buNone/>
-            </a:pPr>
-            <a:r>
-              <a:rPr lang="en-US" sz="1200" b="1" dirty="0">
-                <a:solidFill>
-                  <a:srgbClr val="1C2833"/>
-                </a:solidFill>
-                <a:latin typeface="Arial" pitchFamily="34" charset="0"/>
-                <a:ea typeface="Arial" pitchFamily="34" charset="-122"/>
-                <a:cs typeface="Arial" pitchFamily="34" charset="-120"/>
-              </a:rPr>
-              <a:t>(c) Varāhamihira (~6th c. CE)</a:t>
-            </a:r>
-            <a:pPr algn="l" indent="0" marL="0">
-              <a:lnSpc>
-                <a:spcPts val="1680"/>
-              </a:lnSpc>
-              <a:spcBef>
-                <a:spcPts val="300"/>
-              </a:spcBef>
-              <a:spcAft>
-                <a:spcPts val="300"/>
-              </a:spcAft>
-              <a:buNone/>
-            </a:pPr>
-            <a:r>
-              <a:rPr lang="en-US" sz="1200" dirty="0">
-                <a:solidFill>
-                  <a:srgbClr val="1C2833"/>
-                </a:solidFill>
-                <a:latin typeface="Arial" pitchFamily="34" charset="0"/>
-                <a:ea typeface="Arial" pitchFamily="34" charset="-122"/>
-                <a:cs typeface="Arial" pitchFamily="34" charset="-120"/>
-              </a:rPr>
-              <a:t> — </a:t>
-            </a:r>
-            <a:pPr algn="l" indent="0" marL="0">
-              <a:lnSpc>
-                <a:spcPts val="1680"/>
-              </a:lnSpc>
-              <a:spcBef>
-                <a:spcPts val="300"/>
-              </a:spcBef>
-              <a:spcAft>
-                <a:spcPts val="300"/>
-              </a:spcAft>
-              <a:buNone/>
-            </a:pPr>
-            <a:r>
-              <a:rPr lang="en-US" sz="1200" i="1" dirty="0">
-                <a:solidFill>
-                  <a:srgbClr val="1C2833"/>
-                </a:solidFill>
-                <a:latin typeface="Arial" pitchFamily="34" charset="0"/>
-                <a:ea typeface="Arial" pitchFamily="34" charset="-122"/>
-                <a:cs typeface="Arial" pitchFamily="34" charset="-120"/>
-              </a:rPr>
-              <a:t>Pañca-siddhāntikā</a:t>
-            </a:r>
-            <a:pPr algn="l" indent="0" marL="0">
-              <a:lnSpc>
-                <a:spcPts val="1680"/>
-              </a:lnSpc>
-              <a:spcBef>
-                <a:spcPts val="300"/>
-              </a:spcBef>
-              <a:spcAft>
-                <a:spcPts val="300"/>
-              </a:spcAft>
-              <a:buNone/>
-            </a:pPr>
-            <a:r>
-              <a:rPr lang="en-US" sz="1200" dirty="0">
-                <a:solidFill>
-                  <a:srgbClr val="1C2833"/>
-                </a:solidFill>
-                <a:latin typeface="Arial" pitchFamily="34" charset="0"/>
-                <a:ea typeface="Arial" pitchFamily="34" charset="-122"/>
-                <a:cs typeface="Arial" pitchFamily="34" charset="-120"/>
-              </a:rPr>
-              <a:t>. Compares 5 different astronomical systems including a Greek-derived one. Demonstrates that 6th-c. Indian astronomers were actively engaging with Greek (Yavana) astronomical work.</a:t>
-            </a:r>
-            <a:endParaRPr lang="en-US" sz="1200" dirty="0"/>
-          </a:p>
-        </p:txBody>
-      </p:sp>
-      <p:sp>
-        <p:nvSpPr>
-          <p:cNvPr id="8" name="Text 6"/>
-          <p:cNvSpPr/>
-          <p:nvPr/>
-        </p:nvSpPr>
-        <p:spPr>
-          <a:xfrm>
-            <a:off x="634901" y="2988469"/>
-            <a:ext cx="8102798" cy="281880"/>
-          </a:xfrm>
-          <a:prstGeom prst="rect">
-            <a:avLst/>
-          </a:prstGeom>
-          <a:noFill/>
-          <a:ln/>
-        </p:spPr>
-        <p:txBody>
-          <a:bodyPr wrap="square" lIns="0" tIns="0" rIns="0" bIns="0" rtlCol="0" anchor="t"/>
-          <a:lstStyle/>
-          <a:p>
-            <a:pPr algn="l" marL="342900" indent="-342900">
-              <a:lnSpc>
-                <a:spcPts val="1620"/>
-              </a:lnSpc>
-              <a:spcAft>
-                <a:spcPts val="300"/>
-              </a:spcAft>
-              <a:buSzPct val="100000"/>
-              <a:buChar char="•"/>
-            </a:pPr>
-            <a:r>
-              <a:rPr lang="en-US" sz="1200" b="1" dirty="0">
-                <a:solidFill>
-                  <a:srgbClr val="1C2833"/>
-                </a:solidFill>
-                <a:latin typeface="Arial" pitchFamily="34" charset="0"/>
-                <a:ea typeface="Arial" pitchFamily="34" charset="-122"/>
-                <a:cs typeface="Arial" pitchFamily="34" charset="-120"/>
-              </a:rPr>
-              <a:t>What Indian astronomy DID well:</a:t>
-            </a:r>
-            <a:endParaRPr lang="en-US" sz="1200" dirty="0"/>
-          </a:p>
-        </p:txBody>
-      </p:sp>
-      <p:sp>
-        <p:nvSpPr>
-          <p:cNvPr id="9" name="Text 7"/>
-          <p:cNvSpPr/>
-          <p:nvPr/>
-        </p:nvSpPr>
-        <p:spPr>
-          <a:xfrm>
-            <a:off x="406301" y="3359200"/>
-            <a:ext cx="8498026" cy="639812"/>
-          </a:xfrm>
-          <a:prstGeom prst="rect">
-            <a:avLst/>
-          </a:prstGeom>
-          <a:noFill/>
-          <a:ln/>
-        </p:spPr>
-        <p:txBody>
-          <a:bodyPr wrap="square" lIns="0" tIns="0" rIns="0" bIns="0" rtlCol="0" anchor="t"/>
-          <a:lstStyle/>
-          <a:p>
-            <a:pPr algn="l" indent="0" marL="0">
-              <a:lnSpc>
-                <a:spcPts val="1680"/>
-              </a:lnSpc>
-              <a:spcBef>
-                <a:spcPts val="300"/>
-              </a:spcBef>
-              <a:spcAft>
-                <a:spcPts val="300"/>
-              </a:spcAft>
-              <a:buNone/>
-            </a:pPr>
-            <a:r>
-              <a:rPr lang="en-US" sz="1200" dirty="0">
-                <a:solidFill>
-                  <a:srgbClr val="1C2833"/>
-                </a:solidFill>
-                <a:latin typeface="Arial" pitchFamily="34" charset="0"/>
-                <a:ea typeface="Arial" pitchFamily="34" charset="-122"/>
-                <a:cs typeface="Arial" pitchFamily="34" charset="-120"/>
-              </a:rPr>
-              <a:t>– Precise calendar (lunar + solar reconciliation).    – Eclipse prediction (eclipses were correctly understood as caused by occlusion, not by the demon Rāhu — though the mythological framing co-existed).    – Trigonometric tables (sines, not chords as in Greek tradition).</a:t>
-            </a:r>
-            <a:endParaRPr lang="en-US" sz="1200" dirty="0"/>
-          </a:p>
-        </p:txBody>
-      </p:sp>
-      <p:sp>
-        <p:nvSpPr>
-          <p:cNvPr id="10" name="Text 8"/>
-          <p:cNvSpPr/>
-          <p:nvPr/>
-        </p:nvSpPr>
-        <p:spPr>
-          <a:xfrm>
-            <a:off x="634901" y="4087862"/>
-            <a:ext cx="8102798" cy="281880"/>
-          </a:xfrm>
-          <a:prstGeom prst="rect">
-            <a:avLst/>
-          </a:prstGeom>
-          <a:noFill/>
-          <a:ln/>
-        </p:spPr>
-        <p:txBody>
-          <a:bodyPr wrap="square" lIns="0" tIns="0" rIns="0" bIns="0" rtlCol="0" anchor="t"/>
-          <a:lstStyle/>
-          <a:p>
-            <a:pPr algn="l" marL="342900" indent="-342900">
-              <a:lnSpc>
-                <a:spcPts val="1620"/>
-              </a:lnSpc>
-              <a:spcAft>
-                <a:spcPts val="300"/>
-              </a:spcAft>
-              <a:buSzPct val="100000"/>
-              <a:buChar char="•"/>
-            </a:pPr>
-            <a:r>
-              <a:rPr lang="en-US" sz="1200" b="1" dirty="0">
-                <a:solidFill>
-                  <a:srgbClr val="1C2833"/>
-                </a:solidFill>
-                <a:latin typeface="Arial" pitchFamily="34" charset="0"/>
-                <a:ea typeface="Arial" pitchFamily="34" charset="-122"/>
-                <a:cs typeface="Arial" pitchFamily="34" charset="-120"/>
-              </a:rPr>
-              <a:t>What it DIDN'T do:</a:t>
-            </a:r>
-            <a:endParaRPr lang="en-US" sz="1200" dirty="0"/>
-          </a:p>
-        </p:txBody>
-      </p:sp>
-      <p:sp>
-        <p:nvSpPr>
-          <p:cNvPr id="11" name="Text 9"/>
-          <p:cNvSpPr/>
-          <p:nvPr/>
-        </p:nvSpPr>
-        <p:spPr>
-          <a:xfrm>
-            <a:off x="406301" y="4458593"/>
-            <a:ext cx="8498026" cy="426541"/>
-          </a:xfrm>
-          <a:prstGeom prst="rect">
-            <a:avLst/>
-          </a:prstGeom>
-          <a:noFill/>
-          <a:ln/>
-        </p:spPr>
-        <p:txBody>
-          <a:bodyPr wrap="square" lIns="0" tIns="0" rIns="0" bIns="0" rtlCol="0" anchor="t"/>
-          <a:lstStyle/>
-          <a:p>
-            <a:pPr algn="l" indent="0" marL="0">
-              <a:lnSpc>
-                <a:spcPts val="1680"/>
-              </a:lnSpc>
-              <a:spcBef>
-                <a:spcPts val="300"/>
-              </a:spcBef>
-              <a:spcAft>
-                <a:spcPts val="300"/>
-              </a:spcAft>
-              <a:buNone/>
-            </a:pPr>
-            <a:r>
-              <a:rPr lang="en-US" sz="1200" dirty="0">
-                <a:solidFill>
-                  <a:srgbClr val="1C2833"/>
-                </a:solidFill>
-                <a:latin typeface="Arial" pitchFamily="34" charset="0"/>
-                <a:ea typeface="Arial" pitchFamily="34" charset="-122"/>
-                <a:cs typeface="Arial" pitchFamily="34" charset="-120"/>
-              </a:rPr>
-              <a:t>– Did not develop heliocentrism (despite Aryabhata's hint, the geocentric model dominated until modern times).    – Did not develop telescopic observation (no telescope until the 17th c. anywhere).</a:t>
-            </a:r>
-            <a:endParaRPr lang="en-US" sz="1200" dirty="0"/>
-          </a:p>
-        </p:txBody>
-      </p:sp>
-      <p:sp>
-        <p:nvSpPr>
-          <p:cNvPr id="12" name="Text 10"/>
-          <p:cNvSpPr/>
-          <p:nvPr/>
-        </p:nvSpPr>
-        <p:spPr>
-          <a:xfrm>
-            <a:off x="634901" y="4973985"/>
-            <a:ext cx="8102798" cy="693241"/>
-          </a:xfrm>
-          <a:prstGeom prst="rect">
-            <a:avLst/>
-          </a:prstGeom>
-          <a:noFill/>
-          <a:ln/>
-        </p:spPr>
-        <p:txBody>
-          <a:bodyPr wrap="square" lIns="0" tIns="0" rIns="0" bIns="0" rtlCol="0" anchor="t"/>
-          <a:lstStyle/>
-          <a:p>
-            <a:pPr algn="l" marL="342900" indent="-342900">
-              <a:lnSpc>
-                <a:spcPts val="1620"/>
-              </a:lnSpc>
-              <a:spcAft>
-                <a:spcPts val="300"/>
-              </a:spcAft>
-              <a:buSzPct val="100000"/>
-              <a:buChar char="•"/>
-            </a:pPr>
-            <a:r>
-              <a:rPr lang="en-US" sz="1200" b="1" dirty="0">
-                <a:solidFill>
-                  <a:srgbClr val="1C2833"/>
-                </a:solidFill>
-                <a:latin typeface="Arial" pitchFamily="34" charset="0"/>
-                <a:ea typeface="Arial" pitchFamily="34" charset="-122"/>
-                <a:cs typeface="Arial" pitchFamily="34" charset="-120"/>
-              </a:rPr>
-              <a:t>The interesting in-between:</a:t>
-            </a:r>
-            <a:pPr algn="l" indent="0" marL="0">
-              <a:lnSpc>
-                <a:spcPts val="1620"/>
-              </a:lnSpc>
-              <a:spcAft>
-                <a:spcPts val="300"/>
-              </a:spcAft>
-              <a:buNone/>
-            </a:pPr>
-            <a:r>
-              <a:rPr lang="en-US" sz="1200" dirty="0">
-                <a:solidFill>
-                  <a:srgbClr val="1C2833"/>
-                </a:solidFill>
-                <a:latin typeface="Arial" pitchFamily="34" charset="0"/>
-                <a:ea typeface="Arial" pitchFamily="34" charset="-122"/>
-                <a:cs typeface="Arial" pitchFamily="34" charset="-120"/>
-              </a:rPr>
-              <a:t> the Indian astronomical tradition kept astronomy and astrology TOGETHER under jyotiṣa. Calculation skills used to compute eclipses were the same skills used to compute horoscopes. Modern science separates these; the Indian tradition did not.</a:t>
-            </a:r>
-            <a:endParaRPr lang="en-US" sz="1200" dirty="0"/>
-          </a:p>
-        </p:txBody>
-      </p:sp>
-      <p:sp>
-        <p:nvSpPr>
-          <p:cNvPr id="13" name="Text 11"/>
-          <p:cNvSpPr/>
-          <p:nvPr/>
-        </p:nvSpPr>
-        <p:spPr>
-          <a:xfrm>
-            <a:off x="406301" y="5832277"/>
+            <a:off x="406301" y="4434929"/>
             <a:ext cx="8498026" cy="213271"/>
           </a:xfrm>
           <a:prstGeom prst="rect">
@@ -5052,7 +7245,7 @@
                 <a:ea typeface="Georgia" pitchFamily="34" charset="-122"/>
                 <a:cs typeface="Georgia" pitchFamily="34" charset="-120"/>
               </a:rPr>
-              <a:t>Activity (10 min) — Aryabhata's earth-rotation argument</a:t>
+              <a:t>Core (25 min)</a:t>
             </a:r>
             <a:endParaRPr lang="en-US" sz="1800" dirty="0"/>
           </a:p>
@@ -5066,8 +7259,8 @@
         </p:nvSpPr>
         <p:spPr>
           <a:xfrm>
-            <a:off x="406301" y="870942"/>
-            <a:ext cx="8498026" cy="639812"/>
+            <a:off x="634901" y="883593"/>
+            <a:ext cx="8102798" cy="281880"/>
           </a:xfrm>
           <a:prstGeom prst="rect">
             <a:avLst/>
@@ -5079,20 +7272,18 @@
           <a:bodyPr wrap="square" lIns="0" tIns="0" rIns="0" bIns="0" rtlCol="0" anchor="t"/>
           <a:lstStyle/>
           <a:p>
-            <a:pPr algn="l" indent="0" marL="0">
-              <a:lnSpc>
-                <a:spcPts val="1680"/>
-              </a:lnSpc>
-              <a:spcBef>
-                <a:spcPts val="300"/>
-              </a:spcBef>
-              <a:spcAft>
-                <a:spcPts val="300"/>
-              </a:spcAft>
-              <a:buNone/>
-            </a:pPr>
-            <a:r>
-              <a:rPr lang="en-US" sz="1200" dirty="0">
+            <a:pPr algn="l" marL="342900" indent="-342900">
+              <a:lnSpc>
+                <a:spcPts val="1620"/>
+              </a:lnSpc>
+              <a:spcAft>
+                <a:spcPts val="300"/>
+              </a:spcAft>
+              <a:buSzPct val="100000"/>
+              <a:buChar char="•"/>
+            </a:pPr>
+            <a:r>
+              <a:rPr lang="en-US" sz="1200" b="1" dirty="0">
                 <a:solidFill>
                   <a:srgbClr val="1C2833"/>
                 </a:solidFill>
@@ -5100,7 +7291,7 @@
                 <a:ea typeface="Arial" pitchFamily="34" charset="-122"/>
                 <a:cs typeface="Arial" pitchFamily="34" charset="-120"/>
               </a:rPr>
-              <a:t>Demonstrate with a globe (or a ball with a marked point): – Set the ball spinning. From the spinner's point of view, the room "rotates" around them. – Aryabhata reasoned: maybe the stars don't rotate around us; maybe WE rotate. – This was the correct answer. He was a thousand years ahead of European thinkers on this specific point.</a:t>
+              <a:t>Three specific contributions:</a:t>
             </a:r>
             <a:endParaRPr lang="en-US" sz="1200" dirty="0"/>
           </a:p>
@@ -5258,7 +7449,7 @@
                 <a:ea typeface="Georgia" pitchFamily="34" charset="-122"/>
                 <a:cs typeface="Georgia" pitchFamily="34" charset="-120"/>
               </a:rPr>
-              <a:t>Wrap-up (5 min)</a:t>
+              <a:t>Core (25 min) (cont.)</a:t>
             </a:r>
             <a:endParaRPr lang="en-US" sz="1800" dirty="0"/>
           </a:p>
@@ -5298,7 +7489,7 @@
               <a:buNone/>
             </a:pPr>
             <a:r>
-              <a:rPr lang="en-US" sz="1200" dirty="0">
+              <a:rPr lang="en-US" sz="1200" b="1" dirty="0">
                 <a:solidFill>
                   <a:srgbClr val="1C2833"/>
                 </a:solidFill>
@@ -5306,7 +7497,7 @@
                 <a:ea typeface="Arial" pitchFamily="34" charset="-122"/>
                 <a:cs typeface="Arial" pitchFamily="34" charset="-120"/>
               </a:rPr>
-              <a:t>– Preview Day 8: </a:t>
+              <a:t>(a) Aryabhata (c. 476–550 CE)</a:t>
             </a:r>
             <a:pPr algn="l" indent="0" marL="0">
               <a:lnSpc>
@@ -5321,7 +7512,7 @@
               <a:buNone/>
             </a:pPr>
             <a:r>
-              <a:rPr lang="en-US" sz="1200" i="1" dirty="0">
+              <a:rPr lang="en-US" sz="1200" dirty="0">
                 <a:solidFill>
                   <a:srgbClr val="1C2833"/>
                 </a:solidFill>
@@ -5329,7 +7520,53 @@
                 <a:ea typeface="Arial" pitchFamily="34" charset="-122"/>
                 <a:cs typeface="Arial" pitchFamily="34" charset="-120"/>
               </a:rPr>
-              <a:t>"Project work begins tomorrow."</a:t>
+              <a:t> — wrote </a:t>
+            </a:r>
+            <a:pPr algn="l" indent="0" marL="0">
+              <a:lnSpc>
+                <a:spcPts val="1680"/>
+              </a:lnSpc>
+              <a:spcBef>
+                <a:spcPts val="300"/>
+              </a:spcBef>
+              <a:spcAft>
+                <a:spcPts val="300"/>
+              </a:spcAft>
+              <a:buNone/>
+            </a:pPr>
+            <a:r>
+              <a:rPr lang="en-US" sz="1200" i="1" dirty="0">
+                <a:solidFill>
+                  <a:srgbClr val="1C2833"/>
+                </a:solidFill>
+                <a:latin typeface="Arial" pitchFamily="34" charset="0"/>
+                <a:ea typeface="Arial" pitchFamily="34" charset="-122"/>
+                <a:cs typeface="Arial" pitchFamily="34" charset="-120"/>
+              </a:rPr>
+              <a:t>Aryabhaṭīya</a:t>
+            </a:r>
+            <a:pPr algn="l" indent="0" marL="0">
+              <a:lnSpc>
+                <a:spcPts val="1680"/>
+              </a:lnSpc>
+              <a:spcBef>
+                <a:spcPts val="300"/>
+              </a:spcBef>
+              <a:spcAft>
+                <a:spcPts val="300"/>
+              </a:spcAft>
+              <a:buNone/>
+            </a:pPr>
+            <a:r>
+              <a:rPr lang="en-US" sz="1200" dirty="0">
+                <a:solidFill>
+                  <a:srgbClr val="1C2833"/>
+                </a:solidFill>
+                <a:latin typeface="Arial" pitchFamily="34" charset="0"/>
+                <a:ea typeface="Arial" pitchFamily="34" charset="-122"/>
+                <a:cs typeface="Arial" pitchFamily="34" charset="-120"/>
+              </a:rPr>
+              <a:t> at age 23.</a:t>
             </a:r>
             <a:endParaRPr lang="en-US" sz="1200" dirty="0"/>
           </a:p>
@@ -5338,6 +7575,204 @@
       <p:sp>
         <p:nvSpPr>
           <p:cNvPr id="5" name="Text 3"/>
+          <p:cNvSpPr/>
+          <p:nvPr/>
+        </p:nvSpPr>
+        <p:spPr>
+          <a:xfrm>
+            <a:off x="634901" y="1173063"/>
+            <a:ext cx="8102798" cy="1013222"/>
+          </a:xfrm>
+          <a:prstGeom prst="rect">
+            <a:avLst/>
+          </a:prstGeom>
+          <a:noFill/>
+          <a:ln/>
+        </p:spPr>
+        <p:txBody>
+          <a:bodyPr wrap="square" lIns="0" tIns="0" rIns="0" bIns="0" rtlCol="0" anchor="t"/>
+          <a:lstStyle/>
+          <a:p>
+            <a:pPr algn="l" marL="342900" indent="-342900">
+              <a:lnSpc>
+                <a:spcPts val="1620"/>
+              </a:lnSpc>
+              <a:spcAft>
+                <a:spcPts val="300"/>
+              </a:spcAft>
+              <a:buSzPct val="100000"/>
+              <a:buChar char="•"/>
+            </a:pPr>
+            <a:r>
+              <a:rPr lang="en-US" sz="1200" dirty="0">
+                <a:solidFill>
+                  <a:srgbClr val="1C2833"/>
+                </a:solidFill>
+                <a:latin typeface="Arial" pitchFamily="34" charset="0"/>
+                <a:ea typeface="Arial" pitchFamily="34" charset="-122"/>
+                <a:cs typeface="Arial" pitchFamily="34" charset="-120"/>
+              </a:rPr>
+              <a:t>Proposed the </a:t>
+            </a:r>
+            <a:pPr algn="l" indent="0" marL="0">
+              <a:lnSpc>
+                <a:spcPts val="1620"/>
+              </a:lnSpc>
+              <a:spcAft>
+                <a:spcPts val="300"/>
+              </a:spcAft>
+              <a:buNone/>
+            </a:pPr>
+            <a:r>
+              <a:rPr lang="en-US" sz="1200" b="1" dirty="0">
+                <a:solidFill>
+                  <a:srgbClr val="1C2833"/>
+                </a:solidFill>
+                <a:latin typeface="Arial" pitchFamily="34" charset="0"/>
+                <a:ea typeface="Arial" pitchFamily="34" charset="-122"/>
+                <a:cs typeface="Arial" pitchFamily="34" charset="-120"/>
+              </a:rPr>
+              <a:t>earth rotates on its axis</a:t>
+            </a:r>
+            <a:pPr algn="l" indent="0" marL="0">
+              <a:lnSpc>
+                <a:spcPts val="1620"/>
+              </a:lnSpc>
+              <a:spcAft>
+                <a:spcPts val="300"/>
+              </a:spcAft>
+              <a:buNone/>
+            </a:pPr>
+            <a:r>
+              <a:rPr lang="en-US" sz="1200" dirty="0">
+                <a:solidFill>
+                  <a:srgbClr val="1C2833"/>
+                </a:solidFill>
+                <a:latin typeface="Arial" pitchFamily="34" charset="0"/>
+                <a:ea typeface="Arial" pitchFamily="34" charset="-122"/>
+                <a:cs typeface="Arial" pitchFamily="34" charset="-120"/>
+              </a:rPr>
+              <a:t> (this is correct). Most contemporaries believed the sky rotated.</a:t>
+            </a:r>
+            <a:endParaRPr lang="en-US" sz="1200" dirty="0"/>
+          </a:p>
+          <a:p>
+            <a:pPr algn="l" marL="342900" indent="-342900">
+              <a:lnSpc>
+                <a:spcPts val="1620"/>
+              </a:lnSpc>
+              <a:spcAft>
+                <a:spcPts val="300"/>
+              </a:spcAft>
+              <a:buSzPct val="100000"/>
+              <a:buChar char="•"/>
+            </a:pPr>
+            <a:r>
+              <a:rPr lang="en-US" sz="1200" dirty="0">
+                <a:solidFill>
+                  <a:srgbClr val="1C2833"/>
+                </a:solidFill>
+                <a:latin typeface="Arial" pitchFamily="34" charset="0"/>
+                <a:ea typeface="Arial" pitchFamily="34" charset="-122"/>
+                <a:cs typeface="Arial" pitchFamily="34" charset="-120"/>
+              </a:rPr>
+              <a:t>Approximated </a:t>
+            </a:r>
+            <a:pPr algn="l" indent="0" marL="0">
+              <a:lnSpc>
+                <a:spcPts val="1620"/>
+              </a:lnSpc>
+              <a:spcAft>
+                <a:spcPts val="300"/>
+              </a:spcAft>
+              <a:buNone/>
+            </a:pPr>
+            <a:r>
+              <a:rPr lang="en-US" sz="1200" b="1" dirty="0">
+                <a:solidFill>
+                  <a:srgbClr val="1C2833"/>
+                </a:solidFill>
+                <a:latin typeface="Arial" pitchFamily="34" charset="0"/>
+                <a:ea typeface="Arial" pitchFamily="34" charset="-122"/>
+                <a:cs typeface="Arial" pitchFamily="34" charset="-120"/>
+              </a:rPr>
+              <a:t>π to four decimal places</a:t>
+            </a:r>
+            <a:pPr algn="l" indent="0" marL="0">
+              <a:lnSpc>
+                <a:spcPts val="1620"/>
+              </a:lnSpc>
+              <a:spcAft>
+                <a:spcPts val="300"/>
+              </a:spcAft>
+              <a:buNone/>
+            </a:pPr>
+            <a:r>
+              <a:rPr lang="en-US" sz="1200" dirty="0">
+                <a:solidFill>
+                  <a:srgbClr val="1C2833"/>
+                </a:solidFill>
+                <a:latin typeface="Arial" pitchFamily="34" charset="0"/>
+                <a:ea typeface="Arial" pitchFamily="34" charset="-122"/>
+                <a:cs typeface="Arial" pitchFamily="34" charset="-120"/>
+              </a:rPr>
+              <a:t> (3.1416).</a:t>
+            </a:r>
+            <a:endParaRPr lang="en-US" sz="1200" dirty="0"/>
+          </a:p>
+          <a:p>
+            <a:pPr algn="l" marL="342900" indent="-342900">
+              <a:lnSpc>
+                <a:spcPts val="1620"/>
+              </a:lnSpc>
+              <a:spcAft>
+                <a:spcPts val="300"/>
+              </a:spcAft>
+              <a:buSzPct val="100000"/>
+              <a:buChar char="•"/>
+            </a:pPr>
+            <a:r>
+              <a:rPr lang="en-US" sz="1200" dirty="0">
+                <a:solidFill>
+                  <a:srgbClr val="1C2833"/>
+                </a:solidFill>
+                <a:latin typeface="Arial" pitchFamily="34" charset="0"/>
+                <a:ea typeface="Arial" pitchFamily="34" charset="-122"/>
+                <a:cs typeface="Arial" pitchFamily="34" charset="-120"/>
+              </a:rPr>
+              <a:t>Computed planetary periods and eclipse predictions.</a:t>
+            </a:r>
+            <a:endParaRPr lang="en-US" sz="1200" dirty="0"/>
+          </a:p>
+          <a:p>
+            <a:pPr algn="l" marL="342900" indent="-342900">
+              <a:lnSpc>
+                <a:spcPts val="1620"/>
+              </a:lnSpc>
+              <a:spcAft>
+                <a:spcPts val="300"/>
+              </a:spcAft>
+              <a:buSzPct val="100000"/>
+              <a:buChar char="•"/>
+            </a:pPr>
+            <a:r>
+              <a:rPr lang="en-US" sz="1200" dirty="0">
+                <a:solidFill>
+                  <a:srgbClr val="1C2833"/>
+                </a:solidFill>
+                <a:latin typeface="Arial" pitchFamily="34" charset="0"/>
+                <a:ea typeface="Arial" pitchFamily="34" charset="-122"/>
+                <a:cs typeface="Arial" pitchFamily="34" charset="-120"/>
+              </a:rPr>
+              <a:t>Did NOT propose heliocentrism (the sun-centred model is Copernicus, 1500s).</a:t>
+            </a:r>
+            <a:endParaRPr lang="en-US" sz="1200" dirty="0"/>
+          </a:p>
+        </p:txBody>
+      </p:sp>
+      <p:sp>
+        <p:nvSpPr>
+          <p:cNvPr id="6" name="Text 4"/>
           <p:cNvSpPr/>
           <p:nvPr/>
         </p:nvSpPr>
@@ -5487,7 +7922,7 @@
                 <a:ea typeface="Georgia" pitchFamily="34" charset="-122"/>
                 <a:cs typeface="Georgia" pitchFamily="34" charset="-120"/>
               </a:rPr>
-              <a:t>Student-facing content</a:t>
+              <a:t>Core (25 min) (cont.)</a:t>
             </a:r>
             <a:endParaRPr lang="en-US" sz="1800" dirty="0"/>
           </a:p>
@@ -5501,430 +7936,166 @@
         </p:nvSpPr>
         <p:spPr>
           <a:xfrm>
-            <a:off x="406301" y="883593"/>
-            <a:ext cx="8331398" cy="2112169"/>
-          </a:xfrm>
-          <a:prstGeom prst="rect">
-            <a:avLst/>
-          </a:prstGeom>
-          <a:solidFill>
-            <a:srgbClr val="F4F8F9"/>
-          </a:solidFill>
-          <a:ln/>
-        </p:spPr>
-        <p:txBody>
-          <a:bodyPr wrap="square" rtlCol="0" anchor="ctr"/>
-          <a:lstStyle/>
-          <a:p>
-            <a:pPr indent="0" marL="0">
-              <a:buNone/>
-            </a:pPr>
-            <a:endParaRPr lang="en-US" dirty="0"/>
-          </a:p>
-        </p:txBody>
-      </p:sp>
-      <p:sp>
-        <p:nvSpPr>
-          <p:cNvPr id="5" name="Shape 3"/>
-          <p:cNvSpPr/>
-          <p:nvPr/>
-        </p:nvSpPr>
-        <p:spPr>
-          <a:xfrm>
-            <a:off x="434876" y="883593"/>
-            <a:ext cx="0" cy="2112169"/>
-          </a:xfrm>
-          <a:prstGeom prst="line">
+            <a:off x="406301" y="870942"/>
+            <a:ext cx="8498026" cy="213271"/>
+          </a:xfrm>
+          <a:prstGeom prst="rect">
             <a:avLst/>
           </a:prstGeom>
           <a:noFill/>
-          <a:ln w="57150">
-            <a:solidFill>
-              <a:srgbClr val="FE4447"/>
-            </a:solidFill>
-            <a:prstDash val="solid"/>
-          </a:ln>
-        </p:spPr>
+          <a:ln/>
+        </p:spPr>
+        <p:txBody>
+          <a:bodyPr wrap="square" lIns="0" tIns="0" rIns="0" bIns="0" rtlCol="0" anchor="t"/>
+          <a:lstStyle/>
+          <a:p>
+            <a:pPr algn="l" indent="0" marL="0">
+              <a:lnSpc>
+                <a:spcPts val="1680"/>
+              </a:lnSpc>
+              <a:spcBef>
+                <a:spcPts val="300"/>
+              </a:spcBef>
+              <a:spcAft>
+                <a:spcPts val="300"/>
+              </a:spcAft>
+              <a:buNone/>
+            </a:pPr>
+            <a:r>
+              <a:rPr lang="en-US" sz="1200" b="1" dirty="0">
+                <a:solidFill>
+                  <a:srgbClr val="1C2833"/>
+                </a:solidFill>
+                <a:latin typeface="Arial" pitchFamily="34" charset="0"/>
+                <a:ea typeface="Arial" pitchFamily="34" charset="-122"/>
+                <a:cs typeface="Arial" pitchFamily="34" charset="-120"/>
+              </a:rPr>
+              <a:t>(b) Sūrya-siddhānta (early CE)</a:t>
+            </a:r>
+            <a:pPr algn="l" indent="0" marL="0">
+              <a:lnSpc>
+                <a:spcPts val="1680"/>
+              </a:lnSpc>
+              <a:spcBef>
+                <a:spcPts val="300"/>
+              </a:spcBef>
+              <a:spcAft>
+                <a:spcPts val="300"/>
+              </a:spcAft>
+              <a:buNone/>
+            </a:pPr>
+            <a:r>
+              <a:rPr lang="en-US" sz="1200" dirty="0">
+                <a:solidFill>
+                  <a:srgbClr val="1C2833"/>
+                </a:solidFill>
+                <a:latin typeface="Arial" pitchFamily="34" charset="0"/>
+                <a:ea typeface="Arial" pitchFamily="34" charset="-122"/>
+                <a:cs typeface="Arial" pitchFamily="34" charset="-120"/>
+              </a:rPr>
+              <a:t> — comprehensive astronomical text.</a:t>
+            </a:r>
+            <a:endParaRPr lang="en-US" sz="1200" dirty="0"/>
+          </a:p>
+        </p:txBody>
+      </p:sp>
+      <p:sp>
+        <p:nvSpPr>
+          <p:cNvPr id="5" name="Text 3"/>
+          <p:cNvSpPr/>
+          <p:nvPr/>
+        </p:nvSpPr>
+        <p:spPr>
+          <a:xfrm>
+            <a:off x="634901" y="1173063"/>
+            <a:ext cx="8102798" cy="769441"/>
+          </a:xfrm>
+          <a:prstGeom prst="rect">
+            <a:avLst/>
+          </a:prstGeom>
+          <a:noFill/>
+          <a:ln/>
+        </p:spPr>
+        <p:txBody>
+          <a:bodyPr wrap="square" lIns="0" tIns="0" rIns="0" bIns="0" rtlCol="0" anchor="t"/>
+          <a:lstStyle/>
+          <a:p>
+            <a:pPr algn="l" marL="342900" indent="-342900">
+              <a:lnSpc>
+                <a:spcPts val="1620"/>
+              </a:lnSpc>
+              <a:spcAft>
+                <a:spcPts val="300"/>
+              </a:spcAft>
+              <a:buSzPct val="100000"/>
+              <a:buChar char="•"/>
+            </a:pPr>
+            <a:r>
+              <a:rPr lang="en-US" sz="1200" dirty="0">
+                <a:solidFill>
+                  <a:srgbClr val="1C2833"/>
+                </a:solidFill>
+                <a:latin typeface="Arial" pitchFamily="34" charset="0"/>
+                <a:ea typeface="Arial" pitchFamily="34" charset="-122"/>
+                <a:cs typeface="Arial" pitchFamily="34" charset="-120"/>
+              </a:rPr>
+              <a:t>Detailed planetary calculations.</a:t>
+            </a:r>
+            <a:endParaRPr lang="en-US" sz="1200" dirty="0"/>
+          </a:p>
+          <a:p>
+            <a:pPr algn="l" marL="342900" indent="-342900">
+              <a:lnSpc>
+                <a:spcPts val="1620"/>
+              </a:lnSpc>
+              <a:spcAft>
+                <a:spcPts val="300"/>
+              </a:spcAft>
+              <a:buSzPct val="100000"/>
+              <a:buChar char="•"/>
+            </a:pPr>
+            <a:r>
+              <a:rPr lang="en-US" sz="1200" dirty="0">
+                <a:solidFill>
+                  <a:srgbClr val="1C2833"/>
+                </a:solidFill>
+                <a:latin typeface="Arial" pitchFamily="34" charset="0"/>
+                <a:ea typeface="Arial" pitchFamily="34" charset="-122"/>
+                <a:cs typeface="Arial" pitchFamily="34" charset="-120"/>
+              </a:rPr>
+              <a:t>Earth's circumference computed with ~1% accuracy.</a:t>
+            </a:r>
+            <a:endParaRPr lang="en-US" sz="1200" dirty="0"/>
+          </a:p>
+          <a:p>
+            <a:pPr algn="l" marL="342900" indent="-342900">
+              <a:lnSpc>
+                <a:spcPts val="1620"/>
+              </a:lnSpc>
+              <a:spcAft>
+                <a:spcPts val="300"/>
+              </a:spcAft>
+              <a:buSzPct val="100000"/>
+              <a:buChar char="•"/>
+            </a:pPr>
+            <a:r>
+              <a:rPr lang="en-US" sz="1200" dirty="0">
+                <a:solidFill>
+                  <a:srgbClr val="1C2833"/>
+                </a:solidFill>
+                <a:latin typeface="Arial" pitchFamily="34" charset="0"/>
+                <a:ea typeface="Arial" pitchFamily="34" charset="-122"/>
+                <a:cs typeface="Arial" pitchFamily="34" charset="-120"/>
+              </a:rPr>
+              <a:t>Eclipse predictions accurate enough to publish almanacs.</a:t>
+            </a:r>
+            <a:endParaRPr lang="en-US" sz="1200" dirty="0"/>
+          </a:p>
+        </p:txBody>
       </p:sp>
       <p:sp>
         <p:nvSpPr>
           <p:cNvPr id="6" name="Text 4"/>
-          <p:cNvSpPr/>
-          <p:nvPr/>
-        </p:nvSpPr>
-        <p:spPr>
-          <a:xfrm>
-            <a:off x="692051" y="1074093"/>
-            <a:ext cx="7973389" cy="230981"/>
-          </a:xfrm>
-          <a:prstGeom prst="rect">
-            <a:avLst/>
-          </a:prstGeom>
-          <a:noFill/>
-          <a:ln/>
-        </p:spPr>
-        <p:txBody>
-          <a:bodyPr wrap="square" lIns="0" tIns="0" rIns="0" bIns="0" rtlCol="0" anchor="t"/>
-          <a:lstStyle/>
-          <a:p>
-            <a:pPr algn="l" indent="0" marL="0">
-              <a:lnSpc>
-                <a:spcPts val="1820"/>
-              </a:lnSpc>
-              <a:spcBef>
-                <a:spcPts val="300"/>
-              </a:spcBef>
-              <a:spcAft>
-                <a:spcPts val="300"/>
-              </a:spcAft>
-              <a:buNone/>
-            </a:pPr>
-            <a:r>
-              <a:rPr lang="en-US" sz="1300" b="1" i="1" dirty="0">
-                <a:solidFill>
-                  <a:srgbClr val="1C2833"/>
-                </a:solidFill>
-                <a:latin typeface="Georgia" pitchFamily="34" charset="0"/>
-                <a:ea typeface="Georgia" pitchFamily="34" charset="-122"/>
-                <a:cs typeface="Georgia" pitchFamily="34" charset="-120"/>
-              </a:rPr>
-              <a:t>Three Indian Astronomical Contributions</a:t>
-            </a:r>
-            <a:endParaRPr lang="en-US" sz="1300" dirty="0"/>
-          </a:p>
-        </p:txBody>
-      </p:sp>
-      <p:sp>
-        <p:nvSpPr>
-          <p:cNvPr id="7" name="Text 5"/>
-          <p:cNvSpPr/>
-          <p:nvPr/>
-        </p:nvSpPr>
-        <p:spPr>
-          <a:xfrm>
-            <a:off x="692051" y="1343174"/>
-            <a:ext cx="7973389" cy="923925"/>
-          </a:xfrm>
-          <a:prstGeom prst="rect">
-            <a:avLst/>
-          </a:prstGeom>
-          <a:noFill/>
-          <a:ln/>
-        </p:spPr>
-        <p:txBody>
-          <a:bodyPr wrap="square" lIns="0" tIns="0" rIns="0" bIns="0" rtlCol="0" anchor="t"/>
-          <a:lstStyle/>
-          <a:p>
-            <a:pPr algn="l" indent="0" marL="0">
-              <a:lnSpc>
-                <a:spcPts val="1820"/>
-              </a:lnSpc>
-              <a:spcBef>
-                <a:spcPts val="300"/>
-              </a:spcBef>
-              <a:spcAft>
-                <a:spcPts val="300"/>
-              </a:spcAft>
-              <a:buNone/>
-            </a:pPr>
-            <a:r>
-              <a:rPr lang="en-US" sz="1300" dirty="0">
-                <a:solidFill>
-                  <a:srgbClr val="1C2833"/>
-                </a:solidFill>
-                <a:latin typeface="Georgia" pitchFamily="34" charset="0"/>
-                <a:ea typeface="Georgia" pitchFamily="34" charset="-122"/>
-                <a:cs typeface="Georgia" pitchFamily="34" charset="-120"/>
-              </a:rPr>
-              <a:t>1. </a:t>
-            </a:r>
-            <a:pPr algn="l" indent="0" marL="0">
-              <a:lnSpc>
-                <a:spcPts val="1820"/>
-              </a:lnSpc>
-              <a:spcBef>
-                <a:spcPts val="300"/>
-              </a:spcBef>
-              <a:spcAft>
-                <a:spcPts val="300"/>
-              </a:spcAft>
-              <a:buNone/>
-            </a:pPr>
-            <a:r>
-              <a:rPr lang="en-US" sz="1300" b="1" i="1" dirty="0">
-                <a:solidFill>
-                  <a:srgbClr val="1C2833"/>
-                </a:solidFill>
-                <a:latin typeface="Georgia" pitchFamily="34" charset="0"/>
-                <a:ea typeface="Georgia" pitchFamily="34" charset="-122"/>
-                <a:cs typeface="Georgia" pitchFamily="34" charset="-120"/>
-              </a:rPr>
-              <a:t>Aryabhata (~500 CE)</a:t>
-            </a:r>
-            <a:pPr algn="l" indent="0" marL="0">
-              <a:lnSpc>
-                <a:spcPts val="1820"/>
-              </a:lnSpc>
-              <a:spcBef>
-                <a:spcPts val="300"/>
-              </a:spcBef>
-              <a:spcAft>
-                <a:spcPts val="300"/>
-              </a:spcAft>
-              <a:buNone/>
-            </a:pPr>
-            <a:r>
-              <a:rPr lang="en-US" sz="1300" dirty="0">
-                <a:solidFill>
-                  <a:srgbClr val="1C2833"/>
-                </a:solidFill>
-                <a:latin typeface="Georgia" pitchFamily="34" charset="0"/>
-                <a:ea typeface="Georgia" pitchFamily="34" charset="-122"/>
-                <a:cs typeface="Georgia" pitchFamily="34" charset="-120"/>
-              </a:rPr>
-              <a:t> — proposed earth rotates on its axis; computed π to 4 decimals; predicted eclipses. 2. </a:t>
-            </a:r>
-            <a:pPr algn="l" indent="0" marL="0">
-              <a:lnSpc>
-                <a:spcPts val="1820"/>
-              </a:lnSpc>
-              <a:spcBef>
-                <a:spcPts val="300"/>
-              </a:spcBef>
-              <a:spcAft>
-                <a:spcPts val="300"/>
-              </a:spcAft>
-              <a:buNone/>
-            </a:pPr>
-            <a:r>
-              <a:rPr lang="en-US" sz="1300" b="1" i="1" dirty="0">
-                <a:solidFill>
-                  <a:srgbClr val="1C2833"/>
-                </a:solidFill>
-                <a:latin typeface="Georgia" pitchFamily="34" charset="0"/>
-                <a:ea typeface="Georgia" pitchFamily="34" charset="-122"/>
-                <a:cs typeface="Georgia" pitchFamily="34" charset="-120"/>
-              </a:rPr>
-              <a:t>Sūrya-siddhānta (early CE)</a:t>
-            </a:r>
-            <a:pPr algn="l" indent="0" marL="0">
-              <a:lnSpc>
-                <a:spcPts val="1820"/>
-              </a:lnSpc>
-              <a:spcBef>
-                <a:spcPts val="300"/>
-              </a:spcBef>
-              <a:spcAft>
-                <a:spcPts val="300"/>
-              </a:spcAft>
-              <a:buNone/>
-            </a:pPr>
-            <a:r>
-              <a:rPr lang="en-US" sz="1300" dirty="0">
-                <a:solidFill>
-                  <a:srgbClr val="1C2833"/>
-                </a:solidFill>
-                <a:latin typeface="Georgia" pitchFamily="34" charset="0"/>
-                <a:ea typeface="Georgia" pitchFamily="34" charset="-122"/>
-                <a:cs typeface="Georgia" pitchFamily="34" charset="-120"/>
-              </a:rPr>
-              <a:t> — planetary calculations + earth's circumference to ~1% accuracy. 3. </a:t>
-            </a:r>
-            <a:pPr algn="l" indent="0" marL="0">
-              <a:lnSpc>
-                <a:spcPts val="1820"/>
-              </a:lnSpc>
-              <a:spcBef>
-                <a:spcPts val="300"/>
-              </a:spcBef>
-              <a:spcAft>
-                <a:spcPts val="300"/>
-              </a:spcAft>
-              <a:buNone/>
-            </a:pPr>
-            <a:r>
-              <a:rPr lang="en-US" sz="1300" b="1" i="1" dirty="0">
-                <a:solidFill>
-                  <a:srgbClr val="1C2833"/>
-                </a:solidFill>
-                <a:latin typeface="Georgia" pitchFamily="34" charset="0"/>
-                <a:ea typeface="Georgia" pitchFamily="34" charset="-122"/>
-                <a:cs typeface="Georgia" pitchFamily="34" charset="-120"/>
-              </a:rPr>
-              <a:t>Varāhamihira (~6th c. CE)</a:t>
-            </a:r>
-            <a:pPr algn="l" indent="0" marL="0">
-              <a:lnSpc>
-                <a:spcPts val="1820"/>
-              </a:lnSpc>
-              <a:spcBef>
-                <a:spcPts val="300"/>
-              </a:spcBef>
-              <a:spcAft>
-                <a:spcPts val="300"/>
-              </a:spcAft>
-              <a:buNone/>
-            </a:pPr>
-            <a:r>
-              <a:rPr lang="en-US" sz="1300" dirty="0">
-                <a:solidFill>
-                  <a:srgbClr val="1C2833"/>
-                </a:solidFill>
-                <a:latin typeface="Georgia" pitchFamily="34" charset="0"/>
-                <a:ea typeface="Georgia" pitchFamily="34" charset="-122"/>
-                <a:cs typeface="Georgia" pitchFamily="34" charset="-120"/>
-              </a:rPr>
-              <a:t> — </a:t>
-            </a:r>
-            <a:pPr algn="l" indent="0" marL="0">
-              <a:lnSpc>
-                <a:spcPts val="1820"/>
-              </a:lnSpc>
-              <a:spcBef>
-                <a:spcPts val="300"/>
-              </a:spcBef>
-              <a:spcAft>
-                <a:spcPts val="300"/>
-              </a:spcAft>
-              <a:buNone/>
-            </a:pPr>
-            <a:r>
-              <a:rPr lang="en-US" sz="1300" i="1" dirty="0">
-                <a:solidFill>
-                  <a:srgbClr val="1C2833"/>
-                </a:solidFill>
-                <a:latin typeface="Georgia" pitchFamily="34" charset="0"/>
-                <a:ea typeface="Georgia" pitchFamily="34" charset="-122"/>
-                <a:cs typeface="Georgia" pitchFamily="34" charset="-120"/>
-              </a:rPr>
-              <a:t>Pañca-siddhāntikā</a:t>
-            </a:r>
-            <a:pPr algn="l" indent="0" marL="0">
-              <a:lnSpc>
-                <a:spcPts val="1820"/>
-              </a:lnSpc>
-              <a:spcBef>
-                <a:spcPts val="300"/>
-              </a:spcBef>
-              <a:spcAft>
-                <a:spcPts val="300"/>
-              </a:spcAft>
-              <a:buNone/>
-            </a:pPr>
-            <a:r>
-              <a:rPr lang="en-US" sz="1300" dirty="0">
-                <a:solidFill>
-                  <a:srgbClr val="1C2833"/>
-                </a:solidFill>
-                <a:latin typeface="Georgia" pitchFamily="34" charset="0"/>
-                <a:ea typeface="Georgia" pitchFamily="34" charset="-122"/>
-                <a:cs typeface="Georgia" pitchFamily="34" charset="-120"/>
-              </a:rPr>
-              <a:t> compared 5 astronomical systems including Greek-derived ones.</a:t>
-            </a:r>
-            <a:endParaRPr lang="en-US" sz="1300" dirty="0"/>
-          </a:p>
-        </p:txBody>
-      </p:sp>
-      <p:sp>
-        <p:nvSpPr>
-          <p:cNvPr id="8" name="Text 6"/>
-          <p:cNvSpPr/>
-          <p:nvPr/>
-        </p:nvSpPr>
-        <p:spPr>
-          <a:xfrm>
-            <a:off x="692051" y="2305199"/>
-            <a:ext cx="7973389" cy="230981"/>
-          </a:xfrm>
-          <a:prstGeom prst="rect">
-            <a:avLst/>
-          </a:prstGeom>
-          <a:noFill/>
-          <a:ln/>
-        </p:spPr>
-        <p:txBody>
-          <a:bodyPr wrap="square" lIns="0" tIns="0" rIns="0" bIns="0" rtlCol="0" anchor="t"/>
-          <a:lstStyle/>
-          <a:p>
-            <a:pPr algn="l" indent="0" marL="0">
-              <a:lnSpc>
-                <a:spcPts val="1820"/>
-              </a:lnSpc>
-              <a:spcBef>
-                <a:spcPts val="300"/>
-              </a:spcBef>
-              <a:spcAft>
-                <a:spcPts val="300"/>
-              </a:spcAft>
-              <a:buNone/>
-            </a:pPr>
-            <a:r>
-              <a:rPr lang="en-US" sz="1300" i="1" dirty="0">
-                <a:solidFill>
-                  <a:srgbClr val="1C2833"/>
-                </a:solidFill>
-                <a:latin typeface="Georgia" pitchFamily="34" charset="0"/>
-                <a:ea typeface="Georgia" pitchFamily="34" charset="-122"/>
-                <a:cs typeface="Georgia" pitchFamily="34" charset="-120"/>
-              </a:rPr>
-              <a:t>Aryabhata's earth-rotation claim was ~1000 years ahead of European thinkers on that specific point.</a:t>
-            </a:r>
-            <a:endParaRPr lang="en-US" sz="1300" dirty="0"/>
-          </a:p>
-        </p:txBody>
-      </p:sp>
-      <p:sp>
-        <p:nvSpPr>
-          <p:cNvPr id="9" name="Text 7"/>
-          <p:cNvSpPr/>
-          <p:nvPr/>
-        </p:nvSpPr>
-        <p:spPr>
-          <a:xfrm>
-            <a:off x="692051" y="2574280"/>
-            <a:ext cx="7973389" cy="230981"/>
-          </a:xfrm>
-          <a:prstGeom prst="rect">
-            <a:avLst/>
-          </a:prstGeom>
-          <a:noFill/>
-          <a:ln/>
-        </p:spPr>
-        <p:txBody>
-          <a:bodyPr wrap="square" lIns="0" tIns="0" rIns="0" bIns="0" rtlCol="0" anchor="t"/>
-          <a:lstStyle/>
-          <a:p>
-            <a:pPr algn="l" indent="0" marL="0">
-              <a:lnSpc>
-                <a:spcPts val="1820"/>
-              </a:lnSpc>
-              <a:spcBef>
-                <a:spcPts val="300"/>
-              </a:spcBef>
-              <a:spcAft>
-                <a:spcPts val="300"/>
-              </a:spcAft>
-              <a:buNone/>
-            </a:pPr>
-            <a:r>
-              <a:rPr lang="en-US" sz="1300" i="1" dirty="0">
-                <a:solidFill>
-                  <a:srgbClr val="1C2833"/>
-                </a:solidFill>
-                <a:latin typeface="Georgia" pitchFamily="34" charset="0"/>
-                <a:ea typeface="Georgia" pitchFamily="34" charset="-122"/>
-                <a:cs typeface="Georgia" pitchFamily="34" charset="-120"/>
-              </a:rPr>
-              <a:t>Note: Indian astronomy did NOT develop heliocentrism (Copernicus, 1500s) or telescopes (17th c.).</a:t>
-            </a:r>
-            <a:endParaRPr lang="en-US" sz="1300" dirty="0"/>
-          </a:p>
-        </p:txBody>
-      </p:sp>
-      <p:sp>
-        <p:nvSpPr>
-          <p:cNvPr id="10" name="Text 8"/>
           <p:cNvSpPr/>
           <p:nvPr/>
         </p:nvSpPr>
